--- a/docs/presentation.pptx
+++ b/docs/presentation.pptx
@@ -4,6 +4,9 @@
   <p:sldMasterIdLst>
     <p:sldMasterId id="2147483648" r:id="rId1"/>
   </p:sldMasterIdLst>
+  <p:notesMasterIdLst>
+    <p:notesMasterId r:id="rId14"/>
+  </p:notesMasterIdLst>
   <p:sldIdLst>
     <p:sldId id="256" r:id="rId2"/>
     <p:sldId id="257" r:id="rId3"/>
@@ -18,9 +21,6 @@
     <p:sldId id="266" r:id="rId12"/>
     <p:sldId id="267" r:id="rId13"/>
   </p:sldIdLst>
-  <p:notesMasterIdLst>
-    <p:notesMasterId r:id="rId14"/>
-  </p:notesMasterIdLst>
   <p:sldSz cx="12192000" cy="6858000"/>
   <p:notesSz cx="6858000" cy="12192000"/>
   <p:defaultTextStyle>
@@ -115,6 +115,11 @@
       </a:defRPr>
     </a:lvl9pPr>
   </p:defaultTextStyle>
+  <p:extLst>
+    <p:ext uri="{EFAFB233-063F-42B5-8137-9DF3F51BA10A}">
+      <p15:sldGuideLst xmlns:p15="http://schemas.microsoft.com/office/powerpoint/2012/main"/>
+    </p:ext>
+  </p:extLst>
 </p:presentation>
 </file>
 
@@ -140,234 +145,10 @@
           <a:chExt cx="0" cy="0"/>
         </a:xfrm>
       </p:grpSpPr>
-      <p:sp>
-        <p:nvSpPr>
-          <p:cNvPr id="2" name="Header Placeholder 1"/>
-          <p:cNvSpPr>
-            <a:spLocks noGrp="1"/>
-          </p:cNvSpPr>
-          <p:nvPr>
-            <p:ph type="hdr" sz="quarter"/>
-          </p:nvPr>
-        </p:nvSpPr>
-        <p:spPr>
-          <a:xfrm>
-            <a:off x="0" y="0"/>
-            <a:ext cx="2971800" cy="458788"/>
-          </a:xfrm>
-          <a:prstGeom prst="rect">
-            <a:avLst/>
-          </a:prstGeom>
-        </p:spPr>
-        <p:txBody>
-          <a:bodyPr vert="horz" lIns="91440" tIns="45720" rIns="91440" bIns="45720" rtlCol="0"/>
-          <a:lstStyle>
-            <a:lvl1pPr algn="l">
-              <a:defRPr sz="1200"/>
-            </a:lvl1pPr>
-          </a:lstStyle>
-          <a:p>
-            <a:endParaRPr lang="en-US"/>
-          </a:p>
-        </p:txBody>
-      </p:sp>
-      <p:sp>
-        <p:nvSpPr>
-          <p:cNvPr id="3" name="Date Placeholder 2"/>
-          <p:cNvSpPr>
-            <a:spLocks noGrp="1"/>
-          </p:cNvSpPr>
-          <p:nvPr>
-            <p:ph type="dt" idx="1"/>
-          </p:nvPr>
-        </p:nvSpPr>
-        <p:spPr>
-          <a:xfrm>
-            <a:off x="3884613" y="0"/>
-            <a:ext cx="2971800" cy="458788"/>
-          </a:xfrm>
-          <a:prstGeom prst="rect">
-            <a:avLst/>
-          </a:prstGeom>
-        </p:spPr>
-        <p:txBody>
-          <a:bodyPr vert="horz" lIns="91440" tIns="45720" rIns="91440" bIns="45720" rtlCol="0"/>
-          <a:lstStyle>
-            <a:lvl1pPr algn="r">
-              <a:defRPr sz="1200"/>
-            </a:lvl1pPr>
-          </a:lstStyle>
-          <a:p>
-            <a:fld id="{5282F153-3F37-0F45-9E97-73ACFA13230C}" type="datetimeFigureOut">
-              <a:rPr lang="en-US"/>
-              <a:t>7/23/19</a:t>
-            </a:fld>
-            <a:endParaRPr lang="en-US"/>
-          </a:p>
-        </p:txBody>
-      </p:sp>
-      <p:sp>
-        <p:nvSpPr>
-          <p:cNvPr id="4" name="Slide Image Placeholder 3"/>
-          <p:cNvSpPr>
-            <a:spLocks noGrp="1" noRot="1" noChangeAspect="1"/>
-          </p:cNvSpPr>
-          <p:nvPr>
-            <p:ph type="sldImg" idx="2"/>
-          </p:nvPr>
-        </p:nvSpPr>
-        <p:spPr>
-          <a:xfrm>
-            <a:off x="685800" y="1143000"/>
-            <a:ext cx="5486400" cy="3086100"/>
-          </a:xfrm>
-          <a:prstGeom prst="rect">
-            <a:avLst/>
-          </a:prstGeom>
-          <a:noFill/>
-          <a:ln w="12700">
-            <a:solidFill>
-              <a:prstClr val="black"/>
-            </a:solidFill>
-          </a:ln>
-        </p:spPr>
-        <p:txBody>
-          <a:bodyPr vert="horz" lIns="91440" tIns="45720" rIns="91440" bIns="45720" rtlCol="0" anchor="ctr"/>
-          <a:lstStyle/>
-          <a:p>
-            <a:endParaRPr lang="en-US"/>
-          </a:p>
-        </p:txBody>
-      </p:sp>
-      <p:sp>
-        <p:nvSpPr>
-          <p:cNvPr id="5" name="Notes Placeholder 4"/>
-          <p:cNvSpPr>
-            <a:spLocks noGrp="1"/>
-          </p:cNvSpPr>
-          <p:nvPr>
-            <p:ph type="body" sz="quarter" idx="3"/>
-          </p:nvPr>
-        </p:nvSpPr>
-        <p:spPr>
-          <a:xfrm>
-            <a:off x="685800" y="4400550"/>
-            <a:ext cx="5486400" cy="3600450"/>
-          </a:xfrm>
-          <a:prstGeom prst="rect">
-            <a:avLst/>
-          </a:prstGeom>
-        </p:spPr>
-        <p:txBody>
-          <a:bodyPr vert="horz" lIns="91440" tIns="45720" rIns="91440" bIns="45720" rtlCol="0"/>
-          <a:lstStyle/>
-          <a:p>
-            <a:pPr lvl="0"/>
-            <a:r>
-              <a:rPr lang="en-US"/>
-              <a:t>Click to edit Master text styles</a:t>
-            </a:r>
-          </a:p>
-          <a:p>
-            <a:pPr lvl="1"/>
-            <a:r>
-              <a:rPr lang="en-US"/>
-              <a:t>Second level</a:t>
-            </a:r>
-          </a:p>
-          <a:p>
-            <a:pPr lvl="2"/>
-            <a:r>
-              <a:rPr lang="en-US"/>
-              <a:t>Third level</a:t>
-            </a:r>
-          </a:p>
-          <a:p>
-            <a:pPr lvl="3"/>
-            <a:r>
-              <a:rPr lang="en-US"/>
-              <a:t>Fourth level</a:t>
-            </a:r>
-          </a:p>
-          <a:p>
-            <a:pPr lvl="4"/>
-            <a:r>
-              <a:rPr lang="en-US"/>
-              <a:t>Fifth level</a:t>
-            </a:r>
-          </a:p>
-        </p:txBody>
-      </p:sp>
-      <p:sp>
-        <p:nvSpPr>
-          <p:cNvPr id="6" name="Footer Placeholder 5"/>
-          <p:cNvSpPr>
-            <a:spLocks noGrp="1"/>
-          </p:cNvSpPr>
-          <p:nvPr>
-            <p:ph type="ftr" sz="quarter" idx="4"/>
-          </p:nvPr>
-        </p:nvSpPr>
-        <p:spPr>
-          <a:xfrm>
-            <a:off x="0" y="8685213"/>
-            <a:ext cx="2971800" cy="458787"/>
-          </a:xfrm>
-          <a:prstGeom prst="rect">
-            <a:avLst/>
-          </a:prstGeom>
-        </p:spPr>
-        <p:txBody>
-          <a:bodyPr vert="horz" lIns="91440" tIns="45720" rIns="91440" bIns="45720" rtlCol="0" anchor="b"/>
-          <a:lstStyle>
-            <a:lvl1pPr algn="l">
-              <a:defRPr sz="1200"/>
-            </a:lvl1pPr>
-          </a:lstStyle>
-          <a:p>
-            <a:endParaRPr lang="en-US"/>
-          </a:p>
-        </p:txBody>
-      </p:sp>
-      <p:sp>
-        <p:nvSpPr>
-          <p:cNvPr id="7" name="Slide Number Placeholder 6"/>
-          <p:cNvSpPr>
-            <a:spLocks noGrp="1"/>
-          </p:cNvSpPr>
-          <p:nvPr>
-            <p:ph type="sldNum" sz="quarter" idx="5"/>
-          </p:nvPr>
-        </p:nvSpPr>
-        <p:spPr>
-          <a:xfrm>
-            <a:off x="3884613" y="8685213"/>
-            <a:ext cx="2971800" cy="458787"/>
-          </a:xfrm>
-          <a:prstGeom prst="rect">
-            <a:avLst/>
-          </a:prstGeom>
-        </p:spPr>
-        <p:txBody>
-          <a:bodyPr vert="horz" lIns="91440" tIns="45720" rIns="91440" bIns="45720" rtlCol="0" anchor="b"/>
-          <a:lstStyle>
-            <a:lvl1pPr algn="r">
-              <a:defRPr sz="1200"/>
-            </a:lvl1pPr>
-          </a:lstStyle>
-          <a:p>
-            <a:fld id="{CE5E9CC1-C706-0F49-92D6-E571CC5EEA8F}" type="slidenum">
-              <a:rPr lang="en-US"/>
-              <a:t>‹#›</a:t>
-            </a:fld>
-            <a:endParaRPr lang="en-US"/>
-          </a:p>
-        </p:txBody>
-      </p:sp>
     </p:spTree>
     <p:extLst>
       <p:ext uri="{BB962C8B-B14F-4D97-AF65-F5344CB8AC3E}">
-        <p14:creationId xmlns:p14="http://schemas.microsoft.com/office/powerpoint/2010/main" val="1024086991"/>
+        <p14:creationId xmlns:p14="http://schemas.microsoft.com/office/powerpoint/2010/main" val="1100978730"/>
       </p:ext>
     </p:extLst>
   </p:cSld>
@@ -511,10 +292,6 @@
           <a:bodyPr/>
           <a:lstStyle/>
           <a:p>
-            <a:r>
-              <a:rPr lang="en-US" dirty="0"/>
-              <a:t/>
-            </a:r>
             <a:endParaRPr lang="en-US" dirty="0"/>
           </a:p>
         </p:txBody>
@@ -599,10 +376,6 @@
           <a:bodyPr/>
           <a:lstStyle/>
           <a:p>
-            <a:r>
-              <a:rPr lang="en-US" dirty="0"/>
-              <a:t/>
-            </a:r>
             <a:endParaRPr lang="en-US" dirty="0"/>
           </a:p>
         </p:txBody>
@@ -687,10 +460,6 @@
           <a:bodyPr/>
           <a:lstStyle/>
           <a:p>
-            <a:r>
-              <a:rPr lang="en-US" dirty="0"/>
-              <a:t/>
-            </a:r>
             <a:endParaRPr lang="en-US" dirty="0"/>
           </a:p>
         </p:txBody>
@@ -775,10 +544,6 @@
           <a:bodyPr/>
           <a:lstStyle/>
           <a:p>
-            <a:r>
-              <a:rPr lang="en-US" dirty="0"/>
-              <a:t/>
-            </a:r>
             <a:endParaRPr lang="en-US" dirty="0"/>
           </a:p>
         </p:txBody>
@@ -863,10 +628,6 @@
           <a:bodyPr/>
           <a:lstStyle/>
           <a:p>
-            <a:r>
-              <a:rPr lang="en-US" dirty="0"/>
-              <a:t/>
-            </a:r>
             <a:endParaRPr lang="en-US" dirty="0"/>
           </a:p>
         </p:txBody>
@@ -951,10 +712,6 @@
           <a:bodyPr/>
           <a:lstStyle/>
           <a:p>
-            <a:r>
-              <a:rPr lang="en-US" dirty="0"/>
-              <a:t/>
-            </a:r>
             <a:endParaRPr lang="en-US" dirty="0"/>
           </a:p>
         </p:txBody>
@@ -1039,10 +796,6 @@
           <a:bodyPr/>
           <a:lstStyle/>
           <a:p>
-            <a:r>
-              <a:rPr lang="en-US" dirty="0"/>
-              <a:t/>
-            </a:r>
             <a:endParaRPr lang="en-US" dirty="0"/>
           </a:p>
         </p:txBody>
@@ -1127,10 +880,6 @@
           <a:bodyPr/>
           <a:lstStyle/>
           <a:p>
-            <a:r>
-              <a:rPr lang="en-US" dirty="0"/>
-              <a:t/>
-            </a:r>
             <a:endParaRPr lang="en-US" dirty="0"/>
           </a:p>
         </p:txBody>
@@ -1215,10 +964,6 @@
           <a:bodyPr/>
           <a:lstStyle/>
           <a:p>
-            <a:r>
-              <a:rPr lang="en-US" dirty="0"/>
-              <a:t/>
-            </a:r>
             <a:endParaRPr lang="en-US" dirty="0"/>
           </a:p>
         </p:txBody>
@@ -1303,10 +1048,6 @@
           <a:bodyPr/>
           <a:lstStyle/>
           <a:p>
-            <a:r>
-              <a:rPr lang="en-US" dirty="0"/>
-              <a:t/>
-            </a:r>
             <a:endParaRPr lang="en-US" dirty="0"/>
           </a:p>
         </p:txBody>
@@ -1391,10 +1132,6 @@
           <a:bodyPr/>
           <a:lstStyle/>
           <a:p>
-            <a:r>
-              <a:rPr lang="en-US" dirty="0"/>
-              <a:t/>
-            </a:r>
             <a:endParaRPr lang="en-US" dirty="0"/>
           </a:p>
         </p:txBody>
@@ -1479,10 +1216,6 @@
           <a:bodyPr/>
           <a:lstStyle/>
           <a:p>
-            <a:r>
-              <a:rPr lang="en-US" dirty="0"/>
-              <a:t/>
-            </a:r>
             <a:endParaRPr lang="en-US" dirty="0"/>
           </a:p>
         </p:txBody>
@@ -1556,6 +1289,11 @@
 <file path=ppt/slideMasters/slideMaster1.xml><?xml version="1.0" encoding="utf-8"?>
 <p:sldMaster xmlns:a="http://schemas.openxmlformats.org/drawingml/2006/main" xmlns:r="http://schemas.openxmlformats.org/officeDocument/2006/relationships" xmlns:p="http://schemas.openxmlformats.org/presentationml/2006/main">
   <p:cSld>
+    <p:bg>
+      <p:bgRef idx="1001">
+        <a:schemeClr val="bg1"/>
+      </p:bgRef>
+    </p:bg>
     <p:spTree>
       <p:nvGrpSpPr>
         <p:cNvPr id="1" name=""/>
@@ -1838,6 +1576,7 @@
         <a:solidFill>
           <a:srgbClr val="0B4F6C"/>
         </a:solidFill>
+        <a:effectLst/>
       </p:bgPr>
     </p:bg>
     <p:spTree>
@@ -1937,7 +1676,7 @@
           <a:bodyPr wrap="square" rtlCol="0" anchor="ctr"/>
           <a:lstStyle/>
           <a:p>
-            <a:pPr algn="ctr" indent="0" marL="0">
+            <a:pPr marL="0" indent="0" algn="ctr">
               <a:buNone/>
             </a:pPr>
             <a:r>
@@ -1976,7 +1715,7 @@
           <a:bodyPr wrap="square" rtlCol="0" anchor="ctr"/>
           <a:lstStyle/>
           <a:p>
-            <a:pPr indent="0" marL="0">
+            <a:pPr marL="0" indent="0">
               <a:buNone/>
             </a:pPr>
             <a:r>
@@ -2015,7 +1754,7 @@
           <a:bodyPr wrap="square" rtlCol="0" anchor="ctr"/>
           <a:lstStyle/>
           <a:p>
-            <a:pPr indent="0" marL="0">
+            <a:pPr marL="0" indent="0">
               <a:buNone/>
             </a:pPr>
             <a:r>
@@ -2054,7 +1793,7 @@
           <a:bodyPr wrap="square" rtlCol="0" anchor="ctr"/>
           <a:lstStyle/>
           <a:p>
-            <a:pPr indent="0" marL="0">
+            <a:pPr marL="0" indent="0">
               <a:buNone/>
             </a:pPr>
             <a:r>
@@ -2115,7 +1854,7 @@
           <a:bodyPr wrap="square" rtlCol="0" anchor="ctr"/>
           <a:lstStyle/>
           <a:p>
-            <a:pPr algn="ctr" indent="0" marL="0">
+            <a:pPr marL="0" indent="0" algn="ctr">
               <a:buNone/>
             </a:pPr>
             <a:r>
@@ -2154,7 +1893,7 @@
           <a:bodyPr wrap="square" rtlCol="0" anchor="t"/>
           <a:lstStyle/>
           <a:p>
-            <a:pPr indent="0" marL="0">
+            <a:pPr marL="0" indent="0">
               <a:buNone/>
             </a:pPr>
             <a:r>
@@ -2166,13 +1905,13 @@
                 <a:ea typeface="Calibri" pitchFamily="34" charset="-122"/>
                 <a:cs typeface="Calibri" pitchFamily="34" charset="-120"/>
               </a:rPr>
-              <a:t>TEAM MEMBERS
+              <a:t>
 </a:t>
             </a:r>
             <a:endParaRPr lang="en-US" sz="1100" dirty="0"/>
           </a:p>
           <a:p>
-            <a:pPr indent="0" marL="0">
+            <a:pPr marL="0" indent="0">
               <a:buNone/>
             </a:pPr>
             <a:r>
@@ -2184,7 +1923,7 @@
                 <a:ea typeface="Calibri" pitchFamily="34" charset="-122"/>
                 <a:cs typeface="Calibri" pitchFamily="34" charset="-120"/>
               </a:rPr>
-              <a:t>Huy Nguyen &amp; Raymond Newton</a:t>
+              <a:t>Huy Nguyen</a:t>
             </a:r>
             <a:endParaRPr lang="en-US" sz="1100" dirty="0"/>
           </a:p>
@@ -2211,7 +1950,7 @@
           <a:bodyPr wrap="square" rtlCol="0" anchor="t"/>
           <a:lstStyle/>
           <a:p>
-            <a:pPr indent="0" marL="0">
+            <a:pPr marL="0" indent="0">
               <a:buNone/>
             </a:pPr>
             <a:r>
@@ -2229,7 +1968,7 @@
             <a:endParaRPr lang="en-US" sz="1100" dirty="0"/>
           </a:p>
           <a:p>
-            <a:pPr indent="0" marL="0">
+            <a:pPr marL="0" indent="0">
               <a:buNone/>
             </a:pPr>
             <a:r>
@@ -2263,6 +2002,7 @@
         <a:solidFill>
           <a:srgbClr val="F4F7F6"/>
         </a:solidFill>
+        <a:effectLst/>
       </p:bgPr>
     </p:bg>
     <p:spTree>
@@ -2300,7 +2040,7 @@
           <a:bodyPr wrap="square" rtlCol="0" anchor="ctr"/>
           <a:lstStyle/>
           <a:p>
-            <a:pPr indent="0" marL="0">
+            <a:pPr marL="0" indent="0">
               <a:buNone/>
             </a:pPr>
             <a:r>
@@ -2382,7 +2122,7 @@
           <a:bodyPr wrap="square" rtlCol="0" anchor="ctr"/>
           <a:lstStyle/>
           <a:p>
-            <a:pPr algn="ctr" indent="0" marL="0">
+            <a:pPr marL="0" indent="0" algn="ctr">
               <a:buNone/>
             </a:pPr>
             <a:r>
@@ -2421,7 +2161,7 @@
           </a:solidFill>
           <a:ln/>
           <a:effectLst>
-            <a:outerShdw sx="100000" sy="100000" kx="0" ky="0" algn="bl" rotWithShape="0" blurRad="63500" dist="25400" dir="5400000">
+            <a:outerShdw blurRad="63500" dist="25400" dir="5400000" algn="bl" rotWithShape="0">
               <a:srgbClr val="1A2B33">
                 <a:alpha val="18000"/>
               </a:srgbClr>
@@ -2450,7 +2190,7 @@
           <a:bodyPr wrap="square" rtlCol="0" anchor="t"/>
           <a:lstStyle/>
           <a:p>
-            <a:pPr indent="0" marL="0">
+            <a:pPr marL="0" indent="0">
               <a:buNone/>
             </a:pPr>
             <a:r>
@@ -2512,7 +2252,7 @@
           <a:bodyPr wrap="square" rtlCol="0" anchor="t"/>
           <a:lstStyle/>
           <a:p>
-            <a:pPr indent="0" marL="0">
+            <a:pPr marL="0" indent="0">
               <a:buNone/>
             </a:pPr>
             <a:r>
@@ -2571,7 +2311,7 @@
           <a:bodyPr wrap="square" rtlCol="0" anchor="ctr"/>
           <a:lstStyle/>
           <a:p>
-            <a:pPr algn="ctr" indent="0" marL="0">
+            <a:pPr marL="0" indent="0" algn="ctr">
               <a:buNone/>
             </a:pPr>
             <a:r>
@@ -2610,7 +2350,7 @@
           </a:solidFill>
           <a:ln/>
           <a:effectLst>
-            <a:outerShdw sx="100000" sy="100000" kx="0" ky="0" algn="bl" rotWithShape="0" blurRad="63500" dist="25400" dir="5400000">
+            <a:outerShdw blurRad="63500" dist="25400" dir="5400000" algn="bl" rotWithShape="0">
               <a:srgbClr val="1A2B33">
                 <a:alpha val="18000"/>
               </a:srgbClr>
@@ -2639,7 +2379,7 @@
           <a:bodyPr wrap="square" rtlCol="0" anchor="t"/>
           <a:lstStyle/>
           <a:p>
-            <a:pPr indent="0" marL="0">
+            <a:pPr marL="0" indent="0">
               <a:buNone/>
             </a:pPr>
             <a:r>
@@ -2701,7 +2441,7 @@
           <a:bodyPr wrap="square" rtlCol="0" anchor="t"/>
           <a:lstStyle/>
           <a:p>
-            <a:pPr indent="0" marL="0">
+            <a:pPr marL="0" indent="0">
               <a:buNone/>
             </a:pPr>
             <a:r>
@@ -2760,7 +2500,7 @@
           <a:bodyPr wrap="square" rtlCol="0" anchor="ctr"/>
           <a:lstStyle/>
           <a:p>
-            <a:pPr algn="ctr" indent="0" marL="0">
+            <a:pPr marL="0" indent="0" algn="ctr">
               <a:buNone/>
             </a:pPr>
             <a:r>
@@ -2799,7 +2539,7 @@
           </a:solidFill>
           <a:ln/>
           <a:effectLst>
-            <a:outerShdw sx="100000" sy="100000" kx="0" ky="0" algn="bl" rotWithShape="0" blurRad="63500" dist="25400" dir="5400000">
+            <a:outerShdw blurRad="63500" dist="25400" dir="5400000" algn="bl" rotWithShape="0">
               <a:srgbClr val="1A2B33">
                 <a:alpha val="18000"/>
               </a:srgbClr>
@@ -2828,7 +2568,7 @@
           <a:bodyPr wrap="square" rtlCol="0" anchor="t"/>
           <a:lstStyle/>
           <a:p>
-            <a:pPr indent="0" marL="0">
+            <a:pPr marL="0" indent="0">
               <a:buNone/>
             </a:pPr>
             <a:r>
@@ -2890,7 +2630,7 @@
           <a:bodyPr wrap="square" rtlCol="0" anchor="t"/>
           <a:lstStyle/>
           <a:p>
-            <a:pPr indent="0" marL="0">
+            <a:pPr marL="0" indent="0">
               <a:buNone/>
             </a:pPr>
             <a:r>
@@ -2949,7 +2689,7 @@
           <a:bodyPr wrap="square" rtlCol="0" anchor="ctr"/>
           <a:lstStyle/>
           <a:p>
-            <a:pPr algn="ctr" indent="0" marL="0">
+            <a:pPr marL="0" indent="0" algn="ctr">
               <a:buNone/>
             </a:pPr>
             <a:r>
@@ -2988,7 +2728,7 @@
           </a:solidFill>
           <a:ln/>
           <a:effectLst>
-            <a:outerShdw sx="100000" sy="100000" kx="0" ky="0" algn="bl" rotWithShape="0" blurRad="63500" dist="25400" dir="5400000">
+            <a:outerShdw blurRad="63500" dist="25400" dir="5400000" algn="bl" rotWithShape="0">
               <a:srgbClr val="1A2B33">
                 <a:alpha val="18000"/>
               </a:srgbClr>
@@ -3017,7 +2757,7 @@
           <a:bodyPr wrap="square" rtlCol="0" anchor="t"/>
           <a:lstStyle/>
           <a:p>
-            <a:pPr indent="0" marL="0">
+            <a:pPr marL="0" indent="0">
               <a:buNone/>
             </a:pPr>
             <a:r>
@@ -3079,7 +2819,7 @@
           <a:bodyPr wrap="square" rtlCol="0" anchor="t"/>
           <a:lstStyle/>
           <a:p>
-            <a:pPr indent="0" marL="0">
+            <a:pPr marL="0" indent="0">
               <a:buNone/>
             </a:pPr>
             <a:r>
@@ -3138,7 +2878,7 @@
           <a:bodyPr wrap="square" rtlCol="0" anchor="ctr"/>
           <a:lstStyle/>
           <a:p>
-            <a:pPr algn="ctr" indent="0" marL="0">
+            <a:pPr marL="0" indent="0" algn="ctr">
               <a:buNone/>
             </a:pPr>
             <a:r>
@@ -3177,7 +2917,7 @@
           </a:solidFill>
           <a:ln/>
           <a:effectLst>
-            <a:outerShdw sx="100000" sy="100000" kx="0" ky="0" algn="bl" rotWithShape="0" blurRad="63500" dist="25400" dir="5400000">
+            <a:outerShdw blurRad="63500" dist="25400" dir="5400000" algn="bl" rotWithShape="0">
               <a:srgbClr val="1A2B33">
                 <a:alpha val="18000"/>
               </a:srgbClr>
@@ -3206,7 +2946,7 @@
           <a:bodyPr wrap="square" rtlCol="0" anchor="t"/>
           <a:lstStyle/>
           <a:p>
-            <a:pPr indent="0" marL="0">
+            <a:pPr marL="0" indent="0">
               <a:buNone/>
             </a:pPr>
             <a:r>
@@ -3268,7 +3008,7 @@
           <a:bodyPr wrap="square" rtlCol="0" anchor="t"/>
           <a:lstStyle/>
           <a:p>
-            <a:pPr indent="0" marL="0">
+            <a:pPr marL="0" indent="0">
               <a:buNone/>
             </a:pPr>
             <a:r>
@@ -3327,7 +3067,7 @@
           <a:bodyPr wrap="square" rtlCol="0" anchor="ctr"/>
           <a:lstStyle/>
           <a:p>
-            <a:pPr algn="ctr" indent="0" marL="0">
+            <a:pPr marL="0" indent="0" algn="ctr">
               <a:buNone/>
             </a:pPr>
             <a:r>
@@ -3366,7 +3106,7 @@
           </a:solidFill>
           <a:ln/>
           <a:effectLst>
-            <a:outerShdw sx="100000" sy="100000" kx="0" ky="0" algn="bl" rotWithShape="0" blurRad="63500" dist="25400" dir="5400000">
+            <a:outerShdw blurRad="63500" dist="25400" dir="5400000" algn="bl" rotWithShape="0">
               <a:srgbClr val="1A2B33">
                 <a:alpha val="18000"/>
               </a:srgbClr>
@@ -3395,7 +3135,7 @@
           <a:bodyPr wrap="square" rtlCol="0" anchor="t"/>
           <a:lstStyle/>
           <a:p>
-            <a:pPr indent="0" marL="0">
+            <a:pPr marL="0" indent="0">
               <a:buNone/>
             </a:pPr>
             <a:r>
@@ -3457,7 +3197,7 @@
           <a:bodyPr wrap="square" rtlCol="0" anchor="t"/>
           <a:lstStyle/>
           <a:p>
-            <a:pPr indent="0" marL="0">
+            <a:pPr marL="0" indent="0">
               <a:buNone/>
             </a:pPr>
             <a:r>
@@ -3496,7 +3236,7 @@
           <a:bodyPr wrap="square" rtlCol="0" anchor="ctr"/>
           <a:lstStyle/>
           <a:p>
-            <a:pPr indent="0" marL="0">
+            <a:pPr marL="0" indent="0">
               <a:buNone/>
             </a:pPr>
             <a:r>
@@ -3535,7 +3275,7 @@
           <a:bodyPr wrap="square" rtlCol="0" anchor="ctr"/>
           <a:lstStyle/>
           <a:p>
-            <a:pPr algn="r" indent="0" marL="0">
+            <a:pPr marL="0" indent="0" algn="r">
               <a:buNone/>
             </a:pPr>
             <a:r>
@@ -3569,6 +3309,7 @@
         <a:solidFill>
           <a:srgbClr val="F4F7F6"/>
         </a:solidFill>
+        <a:effectLst/>
       </p:bgPr>
     </p:bg>
     <p:spTree>
@@ -3606,7 +3347,7 @@
           <a:bodyPr wrap="square" rtlCol="0" anchor="ctr"/>
           <a:lstStyle/>
           <a:p>
-            <a:pPr indent="0" marL="0">
+            <a:pPr marL="0" indent="0">
               <a:buNone/>
             </a:pPr>
             <a:r>
@@ -3640,15 +3381,27 @@
         </p:nvGraphicFramePr>
         <p:xfrm>
           <a:off x="548640" y="1143000"/>
-          <a:ext cx="11064240" cy="4846320"/>
+          <a:ext cx="11064240" cy="5029200"/>
         </p:xfrm>
         <a:graphic>
           <a:graphicData uri="http://schemas.openxmlformats.org/drawingml/2006/table">
             <a:tbl>
               <a:tblPr/>
               <a:tblGrid>
-                <a:gridCol w="3657600"/>
-                <a:gridCol w="7406640"/>
+                <a:gridCol w="3657600">
+                  <a:extLst>
+                    <a:ext uri="{9D8B030D-6E8A-4147-A177-3AD203B41FA5}">
+                      <a16:colId xmlns:a16="http://schemas.microsoft.com/office/drawing/2014/main" val="20000"/>
+                    </a:ext>
+                  </a:extLst>
+                </a:gridCol>
+                <a:gridCol w="7406640">
+                  <a:extLst>
+                    <a:ext uri="{9D8B030D-6E8A-4147-A177-3AD203B41FA5}">
+                      <a16:colId xmlns:a16="http://schemas.microsoft.com/office/drawing/2014/main" val="20001"/>
+                    </a:ext>
+                  </a:extLst>
+                </a:gridCol>
               </a:tblGrid>
               <a:tr h="1005840">
                 <a:tc>
@@ -3656,7 +3409,7 @@
                     <a:bodyPr/>
                     <a:lstStyle/>
                     <a:p>
-                      <a:pPr indent="0" marL="0">
+                      <a:pPr marL="0" indent="0">
                         <a:buNone/>
                       </a:pPr>
                       <a:r>
@@ -3677,7 +3430,7 @@
                       </a:endParaRPr>
                     </a:p>
                   </a:txBody>
-                  <a:tcPr marL="91440" marR="91440" marT="45720" marB="45720" anchor="ctr">
+                  <a:tcPr anchor="ctr">
                     <a:lnL w="9525" cap="flat" cmpd="sng" algn="ctr">
                       <a:solidFill>
                         <a:srgbClr val="D9E2E4"/>
@@ -3724,7 +3477,7 @@
                     <a:bodyPr/>
                     <a:lstStyle/>
                     <a:p>
-                      <a:pPr indent="0" marL="0">
+                      <a:pPr marL="0" indent="0">
                         <a:buNone/>
                       </a:pPr>
                       <a:r>
@@ -3745,7 +3498,7 @@
                       </a:endParaRPr>
                     </a:p>
                   </a:txBody>
-                  <a:tcPr marL="91440" marR="91440" marT="45720" marB="45720" anchor="ctr">
+                  <a:tcPr anchor="ctr">
                     <a:lnL w="9525" cap="flat" cmpd="sng" algn="ctr">
                       <a:solidFill>
                         <a:srgbClr val="D9E2E4"/>
@@ -3787,6 +3540,11 @@
                     </a:solidFill>
                   </a:tcPr>
                 </a:tc>
+                <a:extLst>
+                  <a:ext uri="{0D108BD9-81ED-4DB2-BD59-A6C34878D82A}">
+                    <a16:rowId xmlns:a16="http://schemas.microsoft.com/office/drawing/2014/main" val="10000"/>
+                  </a:ext>
+                </a:extLst>
               </a:tr>
               <a:tr h="1005840">
                 <a:tc>
@@ -3794,7 +3552,7 @@
                     <a:bodyPr/>
                     <a:lstStyle/>
                     <a:p>
-                      <a:pPr indent="0" marL="0">
+                      <a:pPr marL="0" indent="0">
                         <a:buNone/>
                       </a:pPr>
                       <a:r>
@@ -3815,7 +3573,7 @@
                       </a:endParaRPr>
                     </a:p>
                   </a:txBody>
-                  <a:tcPr marL="91440" marR="91440" marT="45720" marB="45720" anchor="ctr">
+                  <a:tcPr anchor="ctr">
                     <a:lnL w="9525" cap="flat" cmpd="sng" algn="ctr">
                       <a:solidFill>
                         <a:srgbClr val="D9E2E4"/>
@@ -3862,7 +3620,7 @@
                     <a:bodyPr/>
                     <a:lstStyle/>
                     <a:p>
-                      <a:pPr indent="0" marL="0">
+                      <a:pPr marL="0" indent="0">
                         <a:buNone/>
                       </a:pPr>
                       <a:r>
@@ -3883,7 +3641,7 @@
                       </a:endParaRPr>
                     </a:p>
                   </a:txBody>
-                  <a:tcPr marL="91440" marR="91440" marT="45720" marB="45720" anchor="ctr">
+                  <a:tcPr anchor="ctr">
                     <a:lnL w="9525" cap="flat" cmpd="sng" algn="ctr">
                       <a:solidFill>
                         <a:srgbClr val="D9E2E4"/>
@@ -3925,6 +3683,11 @@
                     </a:solidFill>
                   </a:tcPr>
                 </a:tc>
+                <a:extLst>
+                  <a:ext uri="{0D108BD9-81ED-4DB2-BD59-A6C34878D82A}">
+                    <a16:rowId xmlns:a16="http://schemas.microsoft.com/office/drawing/2014/main" val="10001"/>
+                  </a:ext>
+                </a:extLst>
               </a:tr>
               <a:tr h="1005840">
                 <a:tc>
@@ -3932,7 +3695,7 @@
                     <a:bodyPr/>
                     <a:lstStyle/>
                     <a:p>
-                      <a:pPr indent="0" marL="0">
+                      <a:pPr marL="0" indent="0">
                         <a:buNone/>
                       </a:pPr>
                       <a:r>
@@ -3953,7 +3716,7 @@
                       </a:endParaRPr>
                     </a:p>
                   </a:txBody>
-                  <a:tcPr marL="91440" marR="91440" marT="45720" marB="45720" anchor="ctr">
+                  <a:tcPr anchor="ctr">
                     <a:lnL w="9525" cap="flat" cmpd="sng" algn="ctr">
                       <a:solidFill>
                         <a:srgbClr val="D9E2E4"/>
@@ -4000,7 +3763,7 @@
                     <a:bodyPr/>
                     <a:lstStyle/>
                     <a:p>
-                      <a:pPr indent="0" marL="0">
+                      <a:pPr marL="0" indent="0">
                         <a:buNone/>
                       </a:pPr>
                       <a:r>
@@ -4021,7 +3784,7 @@
                       </a:endParaRPr>
                     </a:p>
                   </a:txBody>
-                  <a:tcPr marL="91440" marR="91440" marT="45720" marB="45720" anchor="ctr">
+                  <a:tcPr anchor="ctr">
                     <a:lnL w="9525" cap="flat" cmpd="sng" algn="ctr">
                       <a:solidFill>
                         <a:srgbClr val="D9E2E4"/>
@@ -4063,6 +3826,11 @@
                     </a:solidFill>
                   </a:tcPr>
                 </a:tc>
+                <a:extLst>
+                  <a:ext uri="{0D108BD9-81ED-4DB2-BD59-A6C34878D82A}">
+                    <a16:rowId xmlns:a16="http://schemas.microsoft.com/office/drawing/2014/main" val="10002"/>
+                  </a:ext>
+                </a:extLst>
               </a:tr>
               <a:tr h="1005840">
                 <a:tc>
@@ -4070,7 +3838,7 @@
                     <a:bodyPr/>
                     <a:lstStyle/>
                     <a:p>
-                      <a:pPr indent="0" marL="0">
+                      <a:pPr marL="0" indent="0">
                         <a:buNone/>
                       </a:pPr>
                       <a:r>
@@ -4091,7 +3859,7 @@
                       </a:endParaRPr>
                     </a:p>
                   </a:txBody>
-                  <a:tcPr marL="91440" marR="91440" marT="45720" marB="45720" anchor="ctr">
+                  <a:tcPr anchor="ctr">
                     <a:lnL w="9525" cap="flat" cmpd="sng" algn="ctr">
                       <a:solidFill>
                         <a:srgbClr val="D9E2E4"/>
@@ -4138,7 +3906,7 @@
                     <a:bodyPr/>
                     <a:lstStyle/>
                     <a:p>
-                      <a:pPr indent="0" marL="0">
+                      <a:pPr marL="0" indent="0">
                         <a:buNone/>
                       </a:pPr>
                       <a:r>
@@ -4159,7 +3927,7 @@
                       </a:endParaRPr>
                     </a:p>
                   </a:txBody>
-                  <a:tcPr marL="91440" marR="91440" marT="45720" marB="45720" anchor="ctr">
+                  <a:tcPr anchor="ctr">
                     <a:lnL w="9525" cap="flat" cmpd="sng" algn="ctr">
                       <a:solidFill>
                         <a:srgbClr val="D9E2E4"/>
@@ -4201,6 +3969,11 @@
                     </a:solidFill>
                   </a:tcPr>
                 </a:tc>
+                <a:extLst>
+                  <a:ext uri="{0D108BD9-81ED-4DB2-BD59-A6C34878D82A}">
+                    <a16:rowId xmlns:a16="http://schemas.microsoft.com/office/drawing/2014/main" val="10003"/>
+                  </a:ext>
+                </a:extLst>
               </a:tr>
               <a:tr h="1005840">
                 <a:tc>
@@ -4208,7 +3981,7 @@
                     <a:bodyPr/>
                     <a:lstStyle/>
                     <a:p>
-                      <a:pPr indent="0" marL="0">
+                      <a:pPr marL="0" indent="0">
                         <a:buNone/>
                       </a:pPr>
                       <a:r>
@@ -4229,7 +4002,7 @@
                       </a:endParaRPr>
                     </a:p>
                   </a:txBody>
-                  <a:tcPr marL="91440" marR="91440" marT="45720" marB="45720" anchor="ctr">
+                  <a:tcPr anchor="ctr">
                     <a:lnL w="9525" cap="flat" cmpd="sng" algn="ctr">
                       <a:solidFill>
                         <a:srgbClr val="D9E2E4"/>
@@ -4276,7 +4049,7 @@
                     <a:bodyPr/>
                     <a:lstStyle/>
                     <a:p>
-                      <a:pPr indent="0" marL="0">
+                      <a:pPr marL="0" indent="0">
                         <a:buNone/>
                       </a:pPr>
                       <a:r>
@@ -4297,7 +4070,7 @@
                       </a:endParaRPr>
                     </a:p>
                   </a:txBody>
-                  <a:tcPr marL="91440" marR="91440" marT="45720" marB="45720" anchor="ctr">
+                  <a:tcPr anchor="ctr">
                     <a:lnL w="9525" cap="flat" cmpd="sng" algn="ctr">
                       <a:solidFill>
                         <a:srgbClr val="D9E2E4"/>
@@ -4339,6 +4112,11 @@
                     </a:solidFill>
                   </a:tcPr>
                 </a:tc>
+                <a:extLst>
+                  <a:ext uri="{0D108BD9-81ED-4DB2-BD59-A6C34878D82A}">
+                    <a16:rowId xmlns:a16="http://schemas.microsoft.com/office/drawing/2014/main" val="10004"/>
+                  </a:ext>
+                </a:extLst>
               </a:tr>
             </a:tbl>
           </a:graphicData>
@@ -4365,7 +4143,7 @@
           <a:bodyPr wrap="square" rtlCol="0" anchor="ctr"/>
           <a:lstStyle/>
           <a:p>
-            <a:pPr indent="0" marL="0">
+            <a:pPr marL="0" indent="0">
               <a:buNone/>
             </a:pPr>
             <a:r>
@@ -4404,7 +4182,7 @@
           <a:bodyPr wrap="square" rtlCol="0" anchor="ctr"/>
           <a:lstStyle/>
           <a:p>
-            <a:pPr algn="r" indent="0" marL="0">
+            <a:pPr marL="0" indent="0" algn="r">
               <a:buNone/>
             </a:pPr>
             <a:r>
@@ -4438,6 +4216,7 @@
         <a:solidFill>
           <a:srgbClr val="0B4F6C"/>
         </a:solidFill>
+        <a:effectLst/>
       </p:bgPr>
     </p:bg>
     <p:spTree>
@@ -4497,7 +4276,7 @@
           <a:bodyPr wrap="square" rtlCol="0" anchor="ctr"/>
           <a:lstStyle/>
           <a:p>
-            <a:pPr indent="0" marL="0">
+            <a:pPr marL="0" indent="0">
               <a:buNone/>
             </a:pPr>
             <a:r>
@@ -4563,11 +4342,11 @@
           <a:bodyPr wrap="square" rtlCol="0" anchor="ctr"/>
           <a:lstStyle/>
           <a:p>
-            <a:pPr indent="0" marL="0">
-              <a:buNone/>
-            </a:pPr>
-            <a:r>
-              <a:rPr lang="en-US" sz="1100" b="1" spc="100" kern="0" dirty="0">
+            <a:pPr marL="0" indent="0">
+              <a:buNone/>
+            </a:pPr>
+            <a:r>
+              <a:rPr lang="en-US" sz="1100" b="1" kern="0" spc="100" dirty="0">
                 <a:solidFill>
                   <a:srgbClr val="8FA9B3"/>
                 </a:solidFill>
@@ -4602,7 +4381,7 @@
           <a:bodyPr wrap="square" rtlCol="0" anchor="t"/>
           <a:lstStyle/>
           <a:p>
-            <a:pPr indent="0" marL="0">
+            <a:pPr marL="0" indent="0">
               <a:buNone/>
             </a:pPr>
             <a:r>
@@ -4641,7 +4420,7 @@
           <a:bodyPr wrap="square" rtlCol="0" anchor="t"/>
           <a:lstStyle/>
           <a:p>
-            <a:pPr indent="0" marL="0">
+            <a:pPr marL="0" indent="0">
               <a:buNone/>
             </a:pPr>
             <a:r>
@@ -4707,11 +4486,11 @@
           <a:bodyPr wrap="square" rtlCol="0" anchor="ctr"/>
           <a:lstStyle/>
           <a:p>
-            <a:pPr indent="0" marL="0">
-              <a:buNone/>
-            </a:pPr>
-            <a:r>
-              <a:rPr lang="en-US" sz="1100" b="1" spc="100" kern="0" dirty="0">
+            <a:pPr marL="0" indent="0">
+              <a:buNone/>
+            </a:pPr>
+            <a:r>
+              <a:rPr lang="en-US" sz="1100" b="1" kern="0" spc="100" dirty="0">
                 <a:solidFill>
                   <a:srgbClr val="8FA9B3"/>
                 </a:solidFill>
@@ -4746,7 +4525,7 @@
           <a:bodyPr wrap="square" rtlCol="0" anchor="t"/>
           <a:lstStyle/>
           <a:p>
-            <a:pPr indent="0" marL="0">
+            <a:pPr marL="0" indent="0">
               <a:buNone/>
             </a:pPr>
             <a:r>
@@ -4785,7 +4564,7 @@
           <a:bodyPr wrap="square" rtlCol="0" anchor="t"/>
           <a:lstStyle/>
           <a:p>
-            <a:pPr indent="0" marL="0">
+            <a:pPr marL="0" indent="0">
               <a:buNone/>
             </a:pPr>
             <a:r>
@@ -4851,11 +4630,11 @@
           <a:bodyPr wrap="square" rtlCol="0" anchor="ctr"/>
           <a:lstStyle/>
           <a:p>
-            <a:pPr indent="0" marL="0">
-              <a:buNone/>
-            </a:pPr>
-            <a:r>
-              <a:rPr lang="en-US" sz="1100" b="1" spc="100" kern="0" dirty="0">
+            <a:pPr marL="0" indent="0">
+              <a:buNone/>
+            </a:pPr>
+            <a:r>
+              <a:rPr lang="en-US" sz="1100" b="1" kern="0" spc="100" dirty="0">
                 <a:solidFill>
                   <a:srgbClr val="8FA9B3"/>
                 </a:solidFill>
@@ -4890,7 +4669,7 @@
           <a:bodyPr wrap="square" rtlCol="0" anchor="t"/>
           <a:lstStyle/>
           <a:p>
-            <a:pPr indent="0" marL="0">
+            <a:pPr marL="0" indent="0">
               <a:buNone/>
             </a:pPr>
             <a:r>
@@ -4929,7 +4708,7 @@
           <a:bodyPr wrap="square" rtlCol="0" anchor="t"/>
           <a:lstStyle/>
           <a:p>
-            <a:pPr indent="0" marL="0">
+            <a:pPr marL="0" indent="0">
               <a:buNone/>
             </a:pPr>
             <a:r>
@@ -4991,7 +4770,7 @@
           <a:bodyPr wrap="square" rtlCol="0" anchor="ctr"/>
           <a:lstStyle/>
           <a:p>
-            <a:pPr indent="0" marL="0">
+            <a:pPr marL="0" indent="0">
               <a:buNone/>
             </a:pPr>
             <a:r>
@@ -5030,7 +4809,7 @@
           <a:bodyPr wrap="square" rtlCol="0" anchor="ctr"/>
           <a:lstStyle/>
           <a:p>
-            <a:pPr indent="0" marL="0">
+            <a:pPr marL="0" indent="0">
               <a:buNone/>
             </a:pPr>
             <a:r>
@@ -5069,7 +4848,7 @@
           <a:bodyPr wrap="square" rtlCol="0" anchor="ctr"/>
           <a:lstStyle/>
           <a:p>
-            <a:pPr indent="0" marL="0">
+            <a:pPr marL="0" indent="0">
               <a:buNone/>
             </a:pPr>
             <a:r>
@@ -5108,7 +4887,7 @@
           <a:bodyPr wrap="square" rtlCol="0" anchor="ctr"/>
           <a:lstStyle/>
           <a:p>
-            <a:pPr algn="r" indent="0" marL="0">
+            <a:pPr marL="0" indent="0" algn="r">
               <a:buNone/>
             </a:pPr>
             <a:r>
@@ -5142,6 +4921,7 @@
         <a:solidFill>
           <a:srgbClr val="F4F7F6"/>
         </a:solidFill>
+        <a:effectLst/>
       </p:bgPr>
     </p:bg>
     <p:spTree>
@@ -5179,7 +4959,7 @@
           <a:bodyPr wrap="square" rtlCol="0" anchor="ctr"/>
           <a:lstStyle/>
           <a:p>
-            <a:pPr indent="0" marL="0">
+            <a:pPr marL="0" indent="0">
               <a:buNone/>
             </a:pPr>
             <a:r>
@@ -5312,7 +5092,7 @@
           <a:bodyPr wrap="square" rtlCol="0" anchor="t"/>
           <a:lstStyle/>
           <a:p>
-            <a:pPr indent="0" marL="0">
+            <a:pPr marL="0" indent="0">
               <a:buNone/>
             </a:pPr>
             <a:r>
@@ -5326,9 +5106,6 @@
               </a:rPr>
               <a:t>Who cares: </a:t>
             </a:r>
-            <a:pPr indent="0" marL="0">
-              <a:buNone/>
-            </a:pPr>
             <a:r>
               <a:rPr lang="en-US" sz="1400" dirty="0">
                 <a:solidFill>
@@ -5365,7 +5142,7 @@
           </a:solidFill>
           <a:ln/>
           <a:effectLst>
-            <a:outerShdw sx="100000" sy="100000" kx="0" ky="0" algn="bl" rotWithShape="0" blurRad="101600" dist="38100" dir="5400000">
+            <a:outerShdw blurRad="101600" dist="38100" dir="5400000" algn="bl" rotWithShape="0">
               <a:srgbClr val="1A2B33">
                 <a:alpha val="25000"/>
               </a:srgbClr>
@@ -5394,7 +5171,7 @@
           <a:bodyPr wrap="square" rtlCol="0" anchor="ctr"/>
           <a:lstStyle/>
           <a:p>
-            <a:pPr algn="ctr" indent="0" marL="0">
+            <a:pPr marL="0" indent="0" algn="ctr">
               <a:buNone/>
             </a:pPr>
             <a:r>
@@ -5433,7 +5210,7 @@
           <a:bodyPr wrap="square" rtlCol="0" anchor="ctr"/>
           <a:lstStyle/>
           <a:p>
-            <a:pPr algn="ctr" indent="0" marL="0">
+            <a:pPr marL="0" indent="0" algn="ctr">
               <a:buNone/>
             </a:pPr>
             <a:r>
@@ -5472,7 +5249,7 @@
           <a:bodyPr wrap="square" rtlCol="0" anchor="ctr"/>
           <a:lstStyle/>
           <a:p>
-            <a:pPr algn="ctr" indent="0" marL="0">
+            <a:pPr marL="0" indent="0" algn="ctr">
               <a:buNone/>
             </a:pPr>
             <a:r>
@@ -5534,7 +5311,7 @@
           <a:bodyPr wrap="square" rtlCol="0" anchor="ctr"/>
           <a:lstStyle/>
           <a:p>
-            <a:pPr algn="ctr" indent="0" marL="0">
+            <a:pPr marL="0" indent="0" algn="ctr">
               <a:buNone/>
             </a:pPr>
             <a:r>
@@ -5573,7 +5350,7 @@
           <a:bodyPr wrap="square" rtlCol="0" anchor="ctr"/>
           <a:lstStyle/>
           <a:p>
-            <a:pPr algn="ctr" indent="0" marL="0">
+            <a:pPr marL="0" indent="0" algn="ctr">
               <a:buNone/>
             </a:pPr>
             <a:r>
@@ -5612,7 +5389,7 @@
           <a:bodyPr wrap="square" rtlCol="0" anchor="ctr"/>
           <a:lstStyle/>
           <a:p>
-            <a:pPr indent="0" marL="0">
+            <a:pPr marL="0" indent="0">
               <a:buNone/>
             </a:pPr>
             <a:r>
@@ -5651,7 +5428,7 @@
           <a:bodyPr wrap="square" rtlCol="0" anchor="ctr"/>
           <a:lstStyle/>
           <a:p>
-            <a:pPr algn="r" indent="0" marL="0">
+            <a:pPr marL="0" indent="0" algn="r">
               <a:buNone/>
             </a:pPr>
             <a:r>
@@ -5685,6 +5462,7 @@
         <a:solidFill>
           <a:srgbClr val="F4F7F6"/>
         </a:solidFill>
+        <a:effectLst/>
       </p:bgPr>
     </p:bg>
     <p:spTree>
@@ -5722,7 +5500,7 @@
           <a:bodyPr wrap="square" rtlCol="0" anchor="ctr"/>
           <a:lstStyle/>
           <a:p>
-            <a:pPr indent="0" marL="0">
+            <a:pPr marL="0" indent="0">
               <a:buNone/>
             </a:pPr>
             <a:r>
@@ -5761,7 +5539,7 @@
           <a:bodyPr wrap="square" rtlCol="0" anchor="ctr"/>
           <a:lstStyle/>
           <a:p>
-            <a:pPr indent="0" marL="0">
+            <a:pPr marL="0" indent="0">
               <a:buNone/>
             </a:pPr>
             <a:r>
@@ -5800,7 +5578,7 @@
           </a:solidFill>
           <a:ln/>
           <a:effectLst>
-            <a:outerShdw sx="100000" sy="100000" kx="0" ky="0" algn="bl" rotWithShape="0" blurRad="76200" dist="25400" dir="5400000">
+            <a:outerShdw blurRad="76200" dist="25400" dir="5400000" algn="bl" rotWithShape="0">
               <a:srgbClr val="1A2B33">
                 <a:alpha val="20000"/>
               </a:srgbClr>
@@ -5849,7 +5627,7 @@
           <a:bodyPr wrap="square" rtlCol="0" anchor="ctr"/>
           <a:lstStyle/>
           <a:p>
-            <a:pPr algn="ctr" indent="0" marL="0">
+            <a:pPr marL="0" indent="0" algn="ctr">
               <a:buNone/>
             </a:pPr>
             <a:r>
@@ -5888,7 +5666,7 @@
           <a:bodyPr wrap="square" rtlCol="0" anchor="ctr"/>
           <a:lstStyle/>
           <a:p>
-            <a:pPr indent="0" marL="0">
+            <a:pPr marL="0" indent="0">
               <a:buNone/>
             </a:pPr>
             <a:r>
@@ -5927,7 +5705,7 @@
           <a:bodyPr wrap="square" rtlCol="0" anchor="t"/>
           <a:lstStyle/>
           <a:p>
-            <a:pPr indent="0" marL="0">
+            <a:pPr marL="0" indent="0">
               <a:buNone/>
             </a:pPr>
             <a:r>
@@ -5966,7 +5744,7 @@
           <a:bodyPr wrap="square" rtlCol="0" anchor="ctr"/>
           <a:lstStyle/>
           <a:p>
-            <a:pPr algn="ctr" indent="0" marL="0">
+            <a:pPr marL="0" indent="0" algn="ctr">
               <a:buNone/>
             </a:pPr>
             <a:r>
@@ -6005,7 +5783,7 @@
           </a:solidFill>
           <a:ln/>
           <a:effectLst>
-            <a:outerShdw sx="100000" sy="100000" kx="0" ky="0" algn="bl" rotWithShape="0" blurRad="76200" dist="25400" dir="5400000">
+            <a:outerShdw blurRad="76200" dist="25400" dir="5400000" algn="bl" rotWithShape="0">
               <a:srgbClr val="1A2B33">
                 <a:alpha val="20000"/>
               </a:srgbClr>
@@ -6054,7 +5832,7 @@
           <a:bodyPr wrap="square" rtlCol="0" anchor="ctr"/>
           <a:lstStyle/>
           <a:p>
-            <a:pPr algn="ctr" indent="0" marL="0">
+            <a:pPr marL="0" indent="0" algn="ctr">
               <a:buNone/>
             </a:pPr>
             <a:r>
@@ -6093,7 +5871,7 @@
           <a:bodyPr wrap="square" rtlCol="0" anchor="ctr"/>
           <a:lstStyle/>
           <a:p>
-            <a:pPr indent="0" marL="0">
+            <a:pPr marL="0" indent="0">
               <a:buNone/>
             </a:pPr>
             <a:r>
@@ -6132,7 +5910,7 @@
           <a:bodyPr wrap="square" rtlCol="0" anchor="t"/>
           <a:lstStyle/>
           <a:p>
-            <a:pPr indent="0" marL="0">
+            <a:pPr marL="0" indent="0">
               <a:buNone/>
             </a:pPr>
             <a:r>
@@ -6171,7 +5949,7 @@
           <a:bodyPr wrap="square" rtlCol="0" anchor="ctr"/>
           <a:lstStyle/>
           <a:p>
-            <a:pPr algn="ctr" indent="0" marL="0">
+            <a:pPr marL="0" indent="0" algn="ctr">
               <a:buNone/>
             </a:pPr>
             <a:r>
@@ -6210,7 +5988,7 @@
           </a:solidFill>
           <a:ln/>
           <a:effectLst>
-            <a:outerShdw sx="100000" sy="100000" kx="0" ky="0" algn="bl" rotWithShape="0" blurRad="76200" dist="25400" dir="5400000">
+            <a:outerShdw blurRad="76200" dist="25400" dir="5400000" algn="bl" rotWithShape="0">
               <a:srgbClr val="1A2B33">
                 <a:alpha val="20000"/>
               </a:srgbClr>
@@ -6259,7 +6037,7 @@
           <a:bodyPr wrap="square" rtlCol="0" anchor="ctr"/>
           <a:lstStyle/>
           <a:p>
-            <a:pPr algn="ctr" indent="0" marL="0">
+            <a:pPr marL="0" indent="0" algn="ctr">
               <a:buNone/>
             </a:pPr>
             <a:r>
@@ -6298,7 +6076,7 @@
           <a:bodyPr wrap="square" rtlCol="0" anchor="ctr"/>
           <a:lstStyle/>
           <a:p>
-            <a:pPr indent="0" marL="0">
+            <a:pPr marL="0" indent="0">
               <a:buNone/>
             </a:pPr>
             <a:r>
@@ -6337,7 +6115,7 @@
           <a:bodyPr wrap="square" rtlCol="0" anchor="t"/>
           <a:lstStyle/>
           <a:p>
-            <a:pPr indent="0" marL="0">
+            <a:pPr marL="0" indent="0">
               <a:buNone/>
             </a:pPr>
             <a:r>
@@ -6398,7 +6176,7 @@
           <a:bodyPr wrap="square" rtlCol="0" anchor="ctr"/>
           <a:lstStyle/>
           <a:p>
-            <a:pPr indent="0" marL="0">
+            <a:pPr marL="0" indent="0">
               <a:buNone/>
             </a:pPr>
             <a:r>
@@ -6412,9 +6190,6 @@
               </a:rPr>
               <a:t>Compliant   </a:t>
             </a:r>
-            <a:pPr indent="0" marL="0">
-              <a:buNone/>
-            </a:pPr>
             <a:r>
               <a:rPr lang="en-US" sz="1400" dirty="0">
                 <a:solidFill>
@@ -6426,9 +6201,6 @@
               </a:rPr>
               <a:t>→  mask detected correctly</a:t>
             </a:r>
-            <a:pPr indent="0" marL="0">
-              <a:buNone/>
-            </a:pPr>
             <a:r>
               <a:rPr lang="en-US" sz="1400" b="1" dirty="0">
                 <a:solidFill>
@@ -6440,9 +6212,6 @@
               </a:rPr>
               <a:t>        ⚠ Non-Compliant   </a:t>
             </a:r>
-            <a:pPr indent="0" marL="0">
-              <a:buNone/>
-            </a:pPr>
             <a:r>
               <a:rPr lang="en-US" sz="1400" dirty="0">
                 <a:solidFill>
@@ -6479,7 +6248,7 @@
           <a:bodyPr wrap="square" rtlCol="0" anchor="ctr"/>
           <a:lstStyle/>
           <a:p>
-            <a:pPr indent="0" marL="0">
+            <a:pPr marL="0" indent="0">
               <a:buNone/>
             </a:pPr>
             <a:r>
@@ -6518,7 +6287,7 @@
           <a:bodyPr wrap="square" rtlCol="0" anchor="ctr"/>
           <a:lstStyle/>
           <a:p>
-            <a:pPr algn="r" indent="0" marL="0">
+            <a:pPr marL="0" indent="0" algn="r">
               <a:buNone/>
             </a:pPr>
             <a:r>
@@ -6552,6 +6321,7 @@
         <a:solidFill>
           <a:srgbClr val="F4F7F6"/>
         </a:solidFill>
+        <a:effectLst/>
       </p:bgPr>
     </p:bg>
     <p:spTree>
@@ -6589,7 +6359,7 @@
           <a:bodyPr wrap="square" rtlCol="0" anchor="ctr"/>
           <a:lstStyle/>
           <a:p>
-            <a:pPr indent="0" marL="0">
+            <a:pPr marL="0" indent="0">
               <a:buNone/>
             </a:pPr>
             <a:r>
@@ -6628,7 +6398,7 @@
           </a:solidFill>
           <a:ln/>
           <a:effectLst>
-            <a:outerShdw sx="100000" sy="100000" kx="0" ky="0" algn="bl" rotWithShape="0" blurRad="76200" dist="25400" dir="5400000">
+            <a:outerShdw blurRad="76200" dist="25400" dir="5400000" algn="bl" rotWithShape="0">
               <a:srgbClr val="1A2B33">
                 <a:alpha val="20000"/>
               </a:srgbClr>
@@ -6677,11 +6447,11 @@
           <a:bodyPr wrap="square" rtlCol="0" anchor="ctr"/>
           <a:lstStyle/>
           <a:p>
-            <a:pPr algn="ctr" indent="0" marL="0">
-              <a:buNone/>
-            </a:pPr>
-            <a:r>
-              <a:rPr lang="en-US" sz="1200" b="1" spc="100" kern="0" dirty="0">
+            <a:pPr marL="0" indent="0" algn="ctr">
+              <a:buNone/>
+            </a:pPr>
+            <a:r>
+              <a:rPr lang="en-US" sz="1200" b="1" kern="0" spc="100" dirty="0">
                 <a:solidFill>
                   <a:srgbClr val="CADCE0"/>
                 </a:solidFill>
@@ -6716,7 +6486,7 @@
           <a:bodyPr wrap="square" rtlCol="0" anchor="ctr"/>
           <a:lstStyle/>
           <a:p>
-            <a:pPr indent="0" marL="0">
+            <a:pPr marL="0" indent="0">
               <a:buNone/>
             </a:pPr>
             <a:r>
@@ -6755,7 +6525,7 @@
           <a:bodyPr wrap="square" rtlCol="0" anchor="t"/>
           <a:lstStyle/>
           <a:p>
-            <a:pPr indent="0" marL="0">
+            <a:pPr marL="0" indent="0">
               <a:buNone/>
             </a:pPr>
             <a:r>
@@ -6794,7 +6564,7 @@
           </a:solidFill>
           <a:ln/>
           <a:effectLst>
-            <a:outerShdw sx="100000" sy="100000" kx="0" ky="0" algn="bl" rotWithShape="0" blurRad="76200" dist="25400" dir="5400000">
+            <a:outerShdw blurRad="76200" dist="25400" dir="5400000" algn="bl" rotWithShape="0">
               <a:srgbClr val="1A2B33">
                 <a:alpha val="20000"/>
               </a:srgbClr>
@@ -6843,11 +6613,11 @@
           <a:bodyPr wrap="square" rtlCol="0" anchor="ctr"/>
           <a:lstStyle/>
           <a:p>
-            <a:pPr algn="ctr" indent="0" marL="0">
-              <a:buNone/>
-            </a:pPr>
-            <a:r>
-              <a:rPr lang="en-US" sz="1200" b="1" spc="100" kern="0" dirty="0">
+            <a:pPr marL="0" indent="0" algn="ctr">
+              <a:buNone/>
+            </a:pPr>
+            <a:r>
+              <a:rPr lang="en-US" sz="1200" b="1" kern="0" spc="100" dirty="0">
                 <a:solidFill>
                   <a:srgbClr val="CADCE0"/>
                 </a:solidFill>
@@ -6882,7 +6652,7 @@
           <a:bodyPr wrap="square" rtlCol="0" anchor="ctr"/>
           <a:lstStyle/>
           <a:p>
-            <a:pPr indent="0" marL="0">
+            <a:pPr marL="0" indent="0">
               <a:buNone/>
             </a:pPr>
             <a:r>
@@ -6921,7 +6691,7 @@
           <a:bodyPr wrap="square" rtlCol="0" anchor="t"/>
           <a:lstStyle/>
           <a:p>
-            <a:pPr indent="0" marL="0">
+            <a:pPr marL="0" indent="0">
               <a:buNone/>
             </a:pPr>
             <a:r>
@@ -6960,7 +6730,7 @@
           </a:solidFill>
           <a:ln/>
           <a:effectLst>
-            <a:outerShdw sx="100000" sy="100000" kx="0" ky="0" algn="bl" rotWithShape="0" blurRad="76200" dist="25400" dir="5400000">
+            <a:outerShdw blurRad="76200" dist="25400" dir="5400000" algn="bl" rotWithShape="0">
               <a:srgbClr val="1A2B33">
                 <a:alpha val="20000"/>
               </a:srgbClr>
@@ -7009,11 +6779,11 @@
           <a:bodyPr wrap="square" rtlCol="0" anchor="ctr"/>
           <a:lstStyle/>
           <a:p>
-            <a:pPr algn="ctr" indent="0" marL="0">
-              <a:buNone/>
-            </a:pPr>
-            <a:r>
-              <a:rPr lang="en-US" sz="1200" b="1" spc="100" kern="0" dirty="0">
+            <a:pPr marL="0" indent="0" algn="ctr">
+              <a:buNone/>
+            </a:pPr>
+            <a:r>
+              <a:rPr lang="en-US" sz="1200" b="1" kern="0" spc="100" dirty="0">
                 <a:solidFill>
                   <a:srgbClr val="CADCE0"/>
                 </a:solidFill>
@@ -7048,7 +6818,7 @@
           <a:bodyPr wrap="square" rtlCol="0" anchor="ctr"/>
           <a:lstStyle/>
           <a:p>
-            <a:pPr indent="0" marL="0">
+            <a:pPr marL="0" indent="0">
               <a:buNone/>
             </a:pPr>
             <a:r>
@@ -7087,7 +6857,7 @@
           <a:bodyPr wrap="square" rtlCol="0" anchor="t"/>
           <a:lstStyle/>
           <a:p>
-            <a:pPr indent="0" marL="0">
+            <a:pPr marL="0" indent="0">
               <a:buNone/>
             </a:pPr>
             <a:r>
@@ -7126,7 +6896,7 @@
           <a:bodyPr wrap="square" rtlCol="0" anchor="t"/>
           <a:lstStyle/>
           <a:p>
-            <a:pPr indent="0" marL="0">
+            <a:pPr marL="0" indent="0">
               <a:buNone/>
             </a:pPr>
             <a:r>
@@ -7140,9 +6910,6 @@
               </a:rPr>
               <a:t>Why this stack: </a:t>
             </a:r>
-            <a:pPr indent="0" marL="0">
-              <a:buNone/>
-            </a:pPr>
             <a:r>
               <a:rPr lang="en-US" sz="1400" dirty="0">
                 <a:solidFill>
@@ -7179,7 +6946,7 @@
           <a:bodyPr wrap="square" rtlCol="0" anchor="ctr"/>
           <a:lstStyle/>
           <a:p>
-            <a:pPr indent="0" marL="0">
+            <a:pPr marL="0" indent="0">
               <a:buNone/>
             </a:pPr>
             <a:r>
@@ -7218,7 +6985,7 @@
           <a:bodyPr wrap="square" rtlCol="0" anchor="ctr"/>
           <a:lstStyle/>
           <a:p>
-            <a:pPr algn="r" indent="0" marL="0">
+            <a:pPr marL="0" indent="0" algn="r">
               <a:buNone/>
             </a:pPr>
             <a:r>
@@ -7252,6 +7019,7 @@
         <a:solidFill>
           <a:srgbClr val="F4F7F6"/>
         </a:solidFill>
+        <a:effectLst/>
       </p:bgPr>
     </p:bg>
     <p:spTree>
@@ -7289,7 +7057,7 @@
           <a:bodyPr wrap="square" rtlCol="0" anchor="ctr"/>
           <a:lstStyle/>
           <a:p>
-            <a:pPr indent="0" marL="0">
+            <a:pPr marL="0" indent="0">
               <a:buNone/>
             </a:pPr>
             <a:r>
@@ -7350,11 +7118,11 @@
           <a:bodyPr wrap="square" rtlCol="0" anchor="ctr"/>
           <a:lstStyle/>
           <a:p>
-            <a:pPr algn="ctr" indent="0" marL="0">
-              <a:buNone/>
-            </a:pPr>
-            <a:r>
-              <a:rPr lang="en-US" sz="1200" b="1" spc="100" kern="0" dirty="0">
+            <a:pPr marL="0" indent="0" algn="ctr">
+              <a:buNone/>
+            </a:pPr>
+            <a:r>
+              <a:rPr lang="en-US" sz="1200" b="1" kern="0" spc="100" dirty="0">
                 <a:solidFill>
                   <a:srgbClr val="8FA9B3"/>
                 </a:solidFill>
@@ -7389,7 +7157,7 @@
           <a:bodyPr wrap="square" rtlCol="0" anchor="ctr"/>
           <a:lstStyle/>
           <a:p>
-            <a:pPr algn="ctr" indent="0" marL="0">
+            <a:pPr marL="0" indent="0" algn="ctr">
               <a:buNone/>
             </a:pPr>
             <a:r>
@@ -7428,7 +7196,7 @@
           <a:bodyPr wrap="square" rtlCol="0" anchor="ctr"/>
           <a:lstStyle/>
           <a:p>
-            <a:pPr algn="ctr" indent="0" marL="0">
+            <a:pPr marL="0" indent="0" algn="ctr">
               <a:buNone/>
             </a:pPr>
             <a:r>
@@ -7490,7 +7258,7 @@
           <a:bodyPr wrap="square" rtlCol="0" anchor="ctr"/>
           <a:lstStyle/>
           <a:p>
-            <a:pPr algn="ctr" indent="0" marL="0">
+            <a:pPr marL="0" indent="0" algn="ctr">
               <a:buNone/>
             </a:pPr>
             <a:r>
@@ -7529,7 +7297,7 @@
           <a:bodyPr wrap="square" rtlCol="0" anchor="ctr"/>
           <a:lstStyle/>
           <a:p>
-            <a:pPr algn="ctr" indent="0" marL="0">
+            <a:pPr marL="0" indent="0" algn="ctr">
               <a:buNone/>
             </a:pPr>
             <a:r>
@@ -7546,7 +7314,7 @@
             <a:endParaRPr lang="en-US" sz="1250" dirty="0"/>
           </a:p>
           <a:p>
-            <a:pPr algn="ctr" indent="0" marL="0">
+            <a:pPr marL="0" indent="0" algn="ctr">
               <a:buNone/>
             </a:pPr>
             <a:r>
@@ -7585,7 +7353,7 @@
           <a:bodyPr wrap="square" rtlCol="0" anchor="ctr"/>
           <a:lstStyle/>
           <a:p>
-            <a:pPr algn="ctr" indent="0" marL="0">
+            <a:pPr marL="0" indent="0" algn="ctr">
               <a:buNone/>
             </a:pPr>
             <a:r>
@@ -7624,7 +7392,7 @@
           <a:bodyPr wrap="square" rtlCol="0" anchor="ctr"/>
           <a:lstStyle/>
           <a:p>
-            <a:pPr indent="0" marL="0">
+            <a:pPr marL="0" indent="0">
               <a:buNone/>
             </a:pPr>
             <a:r>
@@ -7685,7 +7453,7 @@
           <a:bodyPr wrap="square" rtlCol="0" anchor="ctr"/>
           <a:lstStyle/>
           <a:p>
-            <a:pPr algn="ctr" indent="0" marL="0">
+            <a:pPr marL="0" indent="0" algn="ctr">
               <a:buNone/>
             </a:pPr>
             <a:r>
@@ -7746,7 +7514,7 @@
           <a:bodyPr wrap="square" rtlCol="0" anchor="ctr"/>
           <a:lstStyle/>
           <a:p>
-            <a:pPr algn="ctr" indent="0" marL="0">
+            <a:pPr marL="0" indent="0" algn="ctr">
               <a:buNone/>
             </a:pPr>
             <a:r>
@@ -7807,7 +7575,7 @@
           <a:bodyPr wrap="square" rtlCol="0" anchor="ctr"/>
           <a:lstStyle/>
           <a:p>
-            <a:pPr algn="ctr" indent="0" marL="0">
+            <a:pPr marL="0" indent="0" algn="ctr">
               <a:buNone/>
             </a:pPr>
             <a:r>
@@ -7846,7 +7614,7 @@
           <a:bodyPr wrap="square" rtlCol="0" anchor="ctr"/>
           <a:lstStyle/>
           <a:p>
-            <a:pPr indent="0" marL="0">
+            <a:pPr marL="0" indent="0">
               <a:buNone/>
             </a:pPr>
             <a:r>
@@ -7885,7 +7653,7 @@
           <a:bodyPr wrap="square" rtlCol="0" anchor="ctr"/>
           <a:lstStyle/>
           <a:p>
-            <a:pPr indent="0" marL="0">
+            <a:pPr marL="0" indent="0">
               <a:buNone/>
             </a:pPr>
             <a:r>
@@ -8018,7 +7786,7 @@
           <a:bodyPr wrap="square" rtlCol="0" anchor="ctr"/>
           <a:lstStyle/>
           <a:p>
-            <a:pPr indent="0" marL="0">
+            <a:pPr marL="0" indent="0">
               <a:buNone/>
             </a:pPr>
             <a:r>
@@ -8057,7 +7825,7 @@
           <a:bodyPr wrap="square" rtlCol="0" anchor="ctr"/>
           <a:lstStyle/>
           <a:p>
-            <a:pPr algn="r" indent="0" marL="0">
+            <a:pPr marL="0" indent="0" algn="r">
               <a:buNone/>
             </a:pPr>
             <a:r>
@@ -8091,6 +7859,7 @@
         <a:solidFill>
           <a:srgbClr val="F4F7F6"/>
         </a:solidFill>
+        <a:effectLst/>
       </p:bgPr>
     </p:bg>
     <p:spTree>
@@ -8128,7 +7897,7 @@
           <a:bodyPr wrap="square" rtlCol="0" anchor="ctr"/>
           <a:lstStyle/>
           <a:p>
-            <a:pPr indent="0" marL="0">
+            <a:pPr marL="0" indent="0">
               <a:buNone/>
             </a:pPr>
             <a:r>
@@ -8167,7 +7936,7 @@
           </a:solidFill>
           <a:ln/>
           <a:effectLst>
-            <a:outerShdw sx="100000" sy="100000" kx="0" ky="0" algn="bl" rotWithShape="0" blurRad="76200" dist="25400" dir="5400000">
+            <a:outerShdw blurRad="76200" dist="25400" dir="5400000" algn="bl" rotWithShape="0">
               <a:srgbClr val="1A2B33">
                 <a:alpha val="20000"/>
               </a:srgbClr>
@@ -8196,7 +7965,7 @@
           <a:bodyPr wrap="square" rtlCol="0" anchor="ctr"/>
           <a:lstStyle/>
           <a:p>
-            <a:pPr indent="0" marL="0">
+            <a:pPr marL="0" indent="0">
               <a:buNone/>
             </a:pPr>
             <a:r>
@@ -8235,7 +8004,7 @@
           <a:bodyPr wrap="square" rtlCol="0" anchor="t"/>
           <a:lstStyle/>
           <a:p>
-            <a:pPr indent="0" marL="0">
+            <a:pPr marL="0" indent="0">
               <a:buNone/>
             </a:pPr>
             <a:r>
@@ -8274,7 +8043,7 @@
           <a:bodyPr wrap="square" rtlCol="0" anchor="t"/>
           <a:lstStyle/>
           <a:p>
-            <a:pPr indent="0" marL="0">
+            <a:pPr marL="0" indent="0">
               <a:buNone/>
             </a:pPr>
             <a:r>
@@ -8313,7 +8082,7 @@
           <a:bodyPr wrap="square" rtlCol="0" anchor="ctr"/>
           <a:lstStyle/>
           <a:p>
-            <a:pPr algn="ctr" indent="0" marL="0">
+            <a:pPr marL="0" indent="0" algn="ctr">
               <a:buNone/>
             </a:pPr>
             <a:r>
@@ -8352,7 +8121,7 @@
           </a:solidFill>
           <a:ln/>
           <a:effectLst>
-            <a:outerShdw sx="100000" sy="100000" kx="0" ky="0" algn="bl" rotWithShape="0" blurRad="76200" dist="25400" dir="5400000">
+            <a:outerShdw blurRad="76200" dist="25400" dir="5400000" algn="bl" rotWithShape="0">
               <a:srgbClr val="1A2B33">
                 <a:alpha val="20000"/>
               </a:srgbClr>
@@ -8381,7 +8150,7 @@
           <a:bodyPr wrap="square" rtlCol="0" anchor="ctr"/>
           <a:lstStyle/>
           <a:p>
-            <a:pPr indent="0" marL="0">
+            <a:pPr marL="0" indent="0">
               <a:buNone/>
             </a:pPr>
             <a:r>
@@ -8420,7 +8189,7 @@
           <a:bodyPr wrap="square" rtlCol="0" anchor="t"/>
           <a:lstStyle/>
           <a:p>
-            <a:pPr indent="0" marL="0">
+            <a:pPr marL="0" indent="0">
               <a:buNone/>
             </a:pPr>
             <a:r>
@@ -8459,7 +8228,7 @@
           <a:bodyPr wrap="square" rtlCol="0" anchor="t"/>
           <a:lstStyle/>
           <a:p>
-            <a:pPr indent="0" marL="0">
+            <a:pPr marL="0" indent="0">
               <a:buNone/>
             </a:pPr>
             <a:r>
@@ -8498,7 +8267,7 @@
           <a:bodyPr wrap="square" rtlCol="0" anchor="ctr"/>
           <a:lstStyle/>
           <a:p>
-            <a:pPr algn="ctr" indent="0" marL="0">
+            <a:pPr marL="0" indent="0" algn="ctr">
               <a:buNone/>
             </a:pPr>
             <a:r>
@@ -8537,7 +8306,7 @@
           </a:solidFill>
           <a:ln/>
           <a:effectLst>
-            <a:outerShdw sx="100000" sy="100000" kx="0" ky="0" algn="bl" rotWithShape="0" blurRad="76200" dist="25400" dir="5400000">
+            <a:outerShdw blurRad="76200" dist="25400" dir="5400000" algn="bl" rotWithShape="0">
               <a:srgbClr val="1A2B33">
                 <a:alpha val="20000"/>
               </a:srgbClr>
@@ -8566,7 +8335,7 @@
           <a:bodyPr wrap="square" rtlCol="0" anchor="ctr"/>
           <a:lstStyle/>
           <a:p>
-            <a:pPr indent="0" marL="0">
+            <a:pPr marL="0" indent="0">
               <a:buNone/>
             </a:pPr>
             <a:r>
@@ -8605,7 +8374,7 @@
           <a:bodyPr wrap="square" rtlCol="0" anchor="t"/>
           <a:lstStyle/>
           <a:p>
-            <a:pPr indent="0" marL="0">
+            <a:pPr marL="0" indent="0">
               <a:buNone/>
             </a:pPr>
             <a:r>
@@ -8644,7 +8413,7 @@
           <a:bodyPr wrap="square" rtlCol="0" anchor="t"/>
           <a:lstStyle/>
           <a:p>
-            <a:pPr indent="0" marL="0">
+            <a:pPr marL="0" indent="0">
               <a:buNone/>
             </a:pPr>
             <a:r>
@@ -8683,7 +8452,7 @@
           <a:bodyPr wrap="square" rtlCol="0" anchor="ctr"/>
           <a:lstStyle/>
           <a:p>
-            <a:pPr algn="ctr" indent="0" marL="0">
+            <a:pPr marL="0" indent="0" algn="ctr">
               <a:buNone/>
             </a:pPr>
             <a:r>
@@ -8722,7 +8491,7 @@
           </a:solidFill>
           <a:ln/>
           <a:effectLst>
-            <a:outerShdw sx="100000" sy="100000" kx="0" ky="0" algn="bl" rotWithShape="0" blurRad="76200" dist="25400" dir="5400000">
+            <a:outerShdw blurRad="76200" dist="25400" dir="5400000" algn="bl" rotWithShape="0">
               <a:srgbClr val="1A2B33">
                 <a:alpha val="20000"/>
               </a:srgbClr>
@@ -8751,7 +8520,7 @@
           <a:bodyPr wrap="square" rtlCol="0" anchor="ctr"/>
           <a:lstStyle/>
           <a:p>
-            <a:pPr indent="0" marL="0">
+            <a:pPr marL="0" indent="0">
               <a:buNone/>
             </a:pPr>
             <a:r>
@@ -8790,7 +8559,7 @@
           <a:bodyPr wrap="square" rtlCol="0" anchor="t"/>
           <a:lstStyle/>
           <a:p>
-            <a:pPr indent="0" marL="0">
+            <a:pPr marL="0" indent="0">
               <a:buNone/>
             </a:pPr>
             <a:r>
@@ -8829,7 +8598,7 @@
           <a:bodyPr wrap="square" rtlCol="0" anchor="t"/>
           <a:lstStyle/>
           <a:p>
-            <a:pPr indent="0" marL="0">
+            <a:pPr marL="0" indent="0">
               <a:buNone/>
             </a:pPr>
             <a:r>
@@ -8868,7 +8637,7 @@
           <a:bodyPr wrap="square" rtlCol="0" anchor="ctr"/>
           <a:lstStyle/>
           <a:p>
-            <a:pPr indent="0" marL="0">
+            <a:pPr marL="0" indent="0">
               <a:buNone/>
             </a:pPr>
             <a:r>
@@ -8907,7 +8676,7 @@
           <a:bodyPr wrap="square" rtlCol="0" anchor="ctr"/>
           <a:lstStyle/>
           <a:p>
-            <a:pPr indent="0" marL="0">
+            <a:pPr marL="0" indent="0">
               <a:buNone/>
             </a:pPr>
             <a:r>
@@ -8946,7 +8715,7 @@
           <a:bodyPr wrap="square" rtlCol="0" anchor="ctr"/>
           <a:lstStyle/>
           <a:p>
-            <a:pPr algn="r" indent="0" marL="0">
+            <a:pPr marL="0" indent="0" algn="r">
               <a:buNone/>
             </a:pPr>
             <a:r>
@@ -8980,6 +8749,7 @@
         <a:solidFill>
           <a:srgbClr val="F4F7F6"/>
         </a:solidFill>
+        <a:effectLst/>
       </p:bgPr>
     </p:bg>
     <p:spTree>
@@ -9017,7 +8787,7 @@
           <a:bodyPr wrap="square" rtlCol="0" anchor="ctr"/>
           <a:lstStyle/>
           <a:p>
-            <a:pPr indent="0" marL="0">
+            <a:pPr marL="0" indent="0">
               <a:buNone/>
             </a:pPr>
             <a:r>
@@ -9037,14 +8807,14 @@
       </p:sp>
       <p:pic>
         <p:nvPicPr>
-          <p:cNvPr id="3" name="Image 0" descr="/home/claude/pptx_build/training_curve.png">    </p:cNvPr>
+          <p:cNvPr id="3" name="Image 0" descr="/home/claude/pptx_build/training_curve.png"/>
           <p:cNvPicPr>
             <a:picLocks noChangeAspect="1"/>
           </p:cNvPicPr>
           <p:nvPr/>
         </p:nvPicPr>
         <p:blipFill>
-          <a:blip r:embed="rId1"/>
+          <a:blip r:embed="rId3"/>
           <a:stretch>
             <a:fillRect/>
           </a:stretch>
@@ -9080,7 +8850,7 @@
           </a:solidFill>
           <a:ln/>
           <a:effectLst>
-            <a:outerShdw sx="100000" sy="100000" kx="0" ky="0" algn="bl" rotWithShape="0" blurRad="63500" dist="25400" dir="5400000">
+            <a:outerShdw blurRad="63500" dist="25400" dir="5400000" algn="bl" rotWithShape="0">
               <a:srgbClr val="1A2B33">
                 <a:alpha val="18000"/>
               </a:srgbClr>
@@ -9109,7 +8879,7 @@
           <a:bodyPr wrap="square" rtlCol="0" anchor="t"/>
           <a:lstStyle/>
           <a:p>
-            <a:pPr indent="0" marL="0">
+            <a:pPr marL="0" indent="0">
               <a:buNone/>
             </a:pPr>
             <a:r>
@@ -9148,7 +8918,7 @@
           <a:bodyPr wrap="square" rtlCol="0" anchor="t"/>
           <a:lstStyle/>
           <a:p>
-            <a:pPr indent="0" marL="0">
+            <a:pPr marL="0" indent="0">
               <a:buNone/>
             </a:pPr>
             <a:r>
@@ -9187,7 +8957,7 @@
           </a:solidFill>
           <a:ln/>
           <a:effectLst>
-            <a:outerShdw sx="100000" sy="100000" kx="0" ky="0" algn="bl" rotWithShape="0" blurRad="63500" dist="25400" dir="5400000">
+            <a:outerShdw blurRad="63500" dist="25400" dir="5400000" algn="bl" rotWithShape="0">
               <a:srgbClr val="1A2B33">
                 <a:alpha val="18000"/>
               </a:srgbClr>
@@ -9216,7 +8986,7 @@
           <a:bodyPr wrap="square" rtlCol="0" anchor="t"/>
           <a:lstStyle/>
           <a:p>
-            <a:pPr indent="0" marL="0">
+            <a:pPr marL="0" indent="0">
               <a:buNone/>
             </a:pPr>
             <a:r>
@@ -9255,7 +9025,7 @@
           <a:bodyPr wrap="square" rtlCol="0" anchor="t"/>
           <a:lstStyle/>
           <a:p>
-            <a:pPr indent="0" marL="0">
+            <a:pPr marL="0" indent="0">
               <a:buNone/>
             </a:pPr>
             <a:r>
@@ -9294,7 +9064,7 @@
           </a:solidFill>
           <a:ln/>
           <a:effectLst>
-            <a:outerShdw sx="100000" sy="100000" kx="0" ky="0" algn="bl" rotWithShape="0" blurRad="63500" dist="25400" dir="5400000">
+            <a:outerShdw blurRad="63500" dist="25400" dir="5400000" algn="bl" rotWithShape="0">
               <a:srgbClr val="1A2B33">
                 <a:alpha val="18000"/>
               </a:srgbClr>
@@ -9323,7 +9093,7 @@
           <a:bodyPr wrap="square" rtlCol="0" anchor="t"/>
           <a:lstStyle/>
           <a:p>
-            <a:pPr indent="0" marL="0">
+            <a:pPr marL="0" indent="0">
               <a:buNone/>
             </a:pPr>
             <a:r>
@@ -9362,7 +9132,7 @@
           <a:bodyPr wrap="square" rtlCol="0" anchor="t"/>
           <a:lstStyle/>
           <a:p>
-            <a:pPr indent="0" marL="0">
+            <a:pPr marL="0" indent="0">
               <a:buNone/>
             </a:pPr>
             <a:r>
@@ -9401,7 +9171,7 @@
           <a:bodyPr wrap="square" rtlCol="0" anchor="t"/>
           <a:lstStyle/>
           <a:p>
-            <a:pPr indent="0" marL="0">
+            <a:pPr marL="0" indent="0">
               <a:buNone/>
             </a:pPr>
             <a:r>
@@ -9415,9 +9185,6 @@
               </a:rPr>
               <a:t>75 epochs  ·  </a:t>
             </a:r>
-            <a:pPr indent="0" marL="0">
-              <a:buNone/>
-            </a:pPr>
             <a:r>
               <a:rPr lang="en-US" sz="1250" dirty="0">
                 <a:solidFill>
@@ -9454,7 +9221,7 @@
           <a:bodyPr wrap="square" rtlCol="0" anchor="t"/>
           <a:lstStyle/>
           <a:p>
-            <a:pPr indent="0" marL="0">
+            <a:pPr marL="0" indent="0">
               <a:buNone/>
             </a:pPr>
             <a:r>
@@ -9493,7 +9260,7 @@
           <a:bodyPr wrap="square" rtlCol="0" anchor="ctr"/>
           <a:lstStyle/>
           <a:p>
-            <a:pPr indent="0" marL="0">
+            <a:pPr marL="0" indent="0">
               <a:buNone/>
             </a:pPr>
             <a:r>
@@ -9532,7 +9299,7 @@
           <a:bodyPr wrap="square" rtlCol="0" anchor="ctr"/>
           <a:lstStyle/>
           <a:p>
-            <a:pPr algn="r" indent="0" marL="0">
+            <a:pPr marL="0" indent="0" algn="r">
               <a:buNone/>
             </a:pPr>
             <a:r>
@@ -9566,6 +9333,7 @@
         <a:solidFill>
           <a:srgbClr val="F4F7F6"/>
         </a:solidFill>
+        <a:effectLst/>
       </p:bgPr>
     </p:bg>
     <p:spTree>
@@ -9603,7 +9371,7 @@
           <a:bodyPr wrap="square" rtlCol="0" anchor="ctr"/>
           <a:lstStyle/>
           <a:p>
-            <a:pPr indent="0" marL="0">
+            <a:pPr marL="0" indent="0">
               <a:buNone/>
             </a:pPr>
             <a:r>
@@ -9642,7 +9410,7 @@
           <a:bodyPr wrap="square" rtlCol="0" anchor="ctr"/>
           <a:lstStyle/>
           <a:p>
-            <a:pPr indent="0" marL="0">
+            <a:pPr marL="0" indent="0">
               <a:buNone/>
             </a:pPr>
             <a:r>
@@ -9681,7 +9449,7 @@
           </a:solidFill>
           <a:ln/>
           <a:effectLst>
-            <a:outerShdw sx="100000" sy="100000" kx="0" ky="0" algn="bl" rotWithShape="0" blurRad="63500" dist="25400" dir="5400000">
+            <a:outerShdw blurRad="63500" dist="25400" dir="5400000" algn="bl" rotWithShape="0">
               <a:srgbClr val="1A2B33">
                 <a:alpha val="18000"/>
               </a:srgbClr>
@@ -9691,235 +9459,7 @@
       </p:sp>
       <p:pic>
         <p:nvPicPr>
-          <p:cNvPr id="5" name="Image 0" descr="/home/claude/pptx_build/demo1.png">    </p:cNvPr>
-          <p:cNvPicPr>
-            <a:picLocks noChangeAspect="1"/>
-          </p:cNvPicPr>
-          <p:nvPr/>
-        </p:nvPicPr>
-        <p:blipFill>
-          <a:blip r:embed="rId1"/>
-          <a:stretch>
-            <a:fillRect/>
-          </a:stretch>
-        </p:blipFill>
-        <p:spPr>
-          <a:xfrm>
-            <a:off x="640080" y="1554480"/>
-            <a:ext cx="3337560" cy="3566160"/>
-          </a:xfrm>
-          <a:prstGeom prst="rect">
-            <a:avLst/>
-          </a:prstGeom>
-        </p:spPr>
-      </p:pic>
-      <p:sp>
-        <p:nvSpPr>
-          <p:cNvPr id="6" name="Shape 3"/>
-          <p:cNvSpPr/>
-          <p:nvPr/>
-        </p:nvSpPr>
-        <p:spPr>
-          <a:xfrm>
-            <a:off x="685800" y="5193792"/>
-            <a:ext cx="3246120" cy="320040"/>
-          </a:xfrm>
-          <a:prstGeom prst="roundRect">
-            <a:avLst>
-              <a:gd name="adj" fmla="val 48571"/>
-            </a:avLst>
-          </a:prstGeom>
-          <a:solidFill>
-            <a:srgbClr val="C0392B"/>
-          </a:solidFill>
-          <a:ln/>
-        </p:spPr>
-      </p:sp>
-      <p:sp>
-        <p:nvSpPr>
-          <p:cNvPr id="7" name="Text 4"/>
-          <p:cNvSpPr/>
-          <p:nvPr/>
-        </p:nvSpPr>
-        <p:spPr>
-          <a:xfrm>
-            <a:off x="685800" y="5193792"/>
-            <a:ext cx="3246120" cy="320040"/>
-          </a:xfrm>
-          <a:prstGeom prst="rect">
-            <a:avLst/>
-          </a:prstGeom>
-          <a:noFill/>
-          <a:ln/>
-        </p:spPr>
-        <p:txBody>
-          <a:bodyPr wrap="square" rtlCol="0" anchor="ctr"/>
-          <a:lstStyle/>
-          <a:p>
-            <a:pPr algn="ctr" indent="0" marL="0">
-              <a:buNone/>
-            </a:pPr>
-            <a:r>
-              <a:rPr lang="en-US" sz="1000" b="1" dirty="0">
-                <a:solidFill>
-                  <a:srgbClr val="FFFFFF"/>
-                </a:solidFill>
-                <a:latin typeface="Calibri" pitchFamily="34" charset="0"/>
-                <a:ea typeface="Calibri" pitchFamily="34" charset="-122"/>
-                <a:cs typeface="Calibri" pitchFamily="34" charset="-120"/>
-              </a:rPr>
-              <a:t>NON-COMPLIANT — mask missing (0.87)</a:t>
-            </a:r>
-            <a:endParaRPr lang="en-US" sz="1000" dirty="0"/>
-          </a:p>
-        </p:txBody>
-      </p:sp>
-      <p:sp>
-        <p:nvSpPr>
-          <p:cNvPr id="8" name="Shape 5"/>
-          <p:cNvSpPr/>
-          <p:nvPr/>
-        </p:nvSpPr>
-        <p:spPr>
-          <a:xfrm>
-            <a:off x="4297680" y="1463040"/>
-            <a:ext cx="3520440" cy="4114800"/>
-          </a:xfrm>
-          <a:prstGeom prst="roundRect">
-            <a:avLst>
-              <a:gd name="adj" fmla="val 1558"/>
-            </a:avLst>
-          </a:prstGeom>
-          <a:solidFill>
-            <a:srgbClr val="FFFFFF"/>
-          </a:solidFill>
-          <a:ln/>
-          <a:effectLst>
-            <a:outerShdw sx="100000" sy="100000" kx="0" ky="0" algn="bl" rotWithShape="0" blurRad="63500" dist="25400" dir="5400000">
-              <a:srgbClr val="1A2B33">
-                <a:alpha val="18000"/>
-              </a:srgbClr>
-            </a:outerShdw>
-          </a:effectLst>
-        </p:spPr>
-      </p:sp>
-      <p:pic>
-        <p:nvPicPr>
-          <p:cNvPr id="9" name="Image 1" descr="/home/claude/pptx_build/demo2.png">    </p:cNvPr>
-          <p:cNvPicPr>
-            <a:picLocks noChangeAspect="1"/>
-          </p:cNvPicPr>
-          <p:nvPr/>
-        </p:nvPicPr>
-        <p:blipFill>
-          <a:blip r:embed="rId2"/>
-          <a:stretch>
-            <a:fillRect/>
-          </a:stretch>
-        </p:blipFill>
-        <p:spPr>
-          <a:xfrm>
-            <a:off x="4389120" y="1554480"/>
-            <a:ext cx="3337560" cy="3566160"/>
-          </a:xfrm>
-          <a:prstGeom prst="rect">
-            <a:avLst/>
-          </a:prstGeom>
-        </p:spPr>
-      </p:pic>
-      <p:sp>
-        <p:nvSpPr>
-          <p:cNvPr id="10" name="Shape 6"/>
-          <p:cNvSpPr/>
-          <p:nvPr/>
-        </p:nvSpPr>
-        <p:spPr>
-          <a:xfrm>
-            <a:off x="4434840" y="5193792"/>
-            <a:ext cx="3246120" cy="320040"/>
-          </a:xfrm>
-          <a:prstGeom prst="roundRect">
-            <a:avLst>
-              <a:gd name="adj" fmla="val 48571"/>
-            </a:avLst>
-          </a:prstGeom>
-          <a:solidFill>
-            <a:srgbClr val="C0392B"/>
-          </a:solidFill>
-          <a:ln/>
-        </p:spPr>
-      </p:sp>
-      <p:sp>
-        <p:nvSpPr>
-          <p:cNvPr id="11" name="Text 7"/>
-          <p:cNvSpPr/>
-          <p:nvPr/>
-        </p:nvSpPr>
-        <p:spPr>
-          <a:xfrm>
-            <a:off x="4434840" y="5193792"/>
-            <a:ext cx="3246120" cy="320040"/>
-          </a:xfrm>
-          <a:prstGeom prst="rect">
-            <a:avLst/>
-          </a:prstGeom>
-          <a:noFill/>
-          <a:ln/>
-        </p:spPr>
-        <p:txBody>
-          <a:bodyPr wrap="square" rtlCol="0" anchor="ctr"/>
-          <a:lstStyle/>
-          <a:p>
-            <a:pPr algn="ctr" indent="0" marL="0">
-              <a:buNone/>
-            </a:pPr>
-            <a:r>
-              <a:rPr lang="en-US" sz="1000" b="1" dirty="0">
-                <a:solidFill>
-                  <a:srgbClr val="FFFFFF"/>
-                </a:solidFill>
-                <a:latin typeface="Calibri" pitchFamily="34" charset="0"/>
-                <a:ea typeface="Calibri" pitchFamily="34" charset="-122"/>
-                <a:cs typeface="Calibri" pitchFamily="34" charset="-120"/>
-              </a:rPr>
-              <a:t>NON-COMPLIANT — mask missing (0.90)</a:t>
-            </a:r>
-            <a:endParaRPr lang="en-US" sz="1000" dirty="0"/>
-          </a:p>
-        </p:txBody>
-      </p:sp>
-      <p:sp>
-        <p:nvSpPr>
-          <p:cNvPr id="12" name="Shape 8"/>
-          <p:cNvSpPr/>
-          <p:nvPr/>
-        </p:nvSpPr>
-        <p:spPr>
-          <a:xfrm>
-            <a:off x="8046720" y="1463040"/>
-            <a:ext cx="3520440" cy="4114800"/>
-          </a:xfrm>
-          <a:prstGeom prst="roundRect">
-            <a:avLst>
-              <a:gd name="adj" fmla="val 1558"/>
-            </a:avLst>
-          </a:prstGeom>
-          <a:solidFill>
-            <a:srgbClr val="FFFFFF"/>
-          </a:solidFill>
-          <a:ln/>
-          <a:effectLst>
-            <a:outerShdw sx="100000" sy="100000" kx="0" ky="0" algn="bl" rotWithShape="0" blurRad="63500" dist="25400" dir="5400000">
-              <a:srgbClr val="1A2B33">
-                <a:alpha val="18000"/>
-              </a:srgbClr>
-            </a:outerShdw>
-          </a:effectLst>
-        </p:spPr>
-      </p:sp>
-      <p:pic>
-        <p:nvPicPr>
-          <p:cNvPr id="13" name="Image 2" descr="/home/claude/pptx_build/demo3.png">    </p:cNvPr>
+          <p:cNvPr id="5" name="Image 0" descr="/home/claude/pptx_build/demo1.png"/>
           <p:cNvPicPr>
             <a:picLocks noChangeAspect="1"/>
           </p:cNvPicPr>
@@ -9933,7 +9473,7 @@
         </p:blipFill>
         <p:spPr>
           <a:xfrm>
-            <a:off x="8138160" y="1554480"/>
+            <a:off x="640080" y="1554480"/>
             <a:ext cx="3337560" cy="3566160"/>
           </a:xfrm>
           <a:prstGeom prst="rect">
@@ -9943,13 +9483,13 @@
       </p:pic>
       <p:sp>
         <p:nvSpPr>
-          <p:cNvPr id="14" name="Shape 9"/>
-          <p:cNvSpPr/>
-          <p:nvPr/>
-        </p:nvSpPr>
-        <p:spPr>
-          <a:xfrm>
-            <a:off x="8183880" y="5193792"/>
+          <p:cNvPr id="6" name="Shape 3"/>
+          <p:cNvSpPr/>
+          <p:nvPr/>
+        </p:nvSpPr>
+        <p:spPr>
+          <a:xfrm>
+            <a:off x="685800" y="5193792"/>
             <a:ext cx="3246120" cy="320040"/>
           </a:xfrm>
           <a:prstGeom prst="roundRect">
@@ -9958,6 +9498,234 @@
             </a:avLst>
           </a:prstGeom>
           <a:solidFill>
+            <a:srgbClr val="C0392B"/>
+          </a:solidFill>
+          <a:ln/>
+        </p:spPr>
+      </p:sp>
+      <p:sp>
+        <p:nvSpPr>
+          <p:cNvPr id="7" name="Text 4"/>
+          <p:cNvSpPr/>
+          <p:nvPr/>
+        </p:nvSpPr>
+        <p:spPr>
+          <a:xfrm>
+            <a:off x="685800" y="5193792"/>
+            <a:ext cx="3246120" cy="320040"/>
+          </a:xfrm>
+          <a:prstGeom prst="rect">
+            <a:avLst/>
+          </a:prstGeom>
+          <a:noFill/>
+          <a:ln/>
+        </p:spPr>
+        <p:txBody>
+          <a:bodyPr wrap="square" rtlCol="0" anchor="ctr"/>
+          <a:lstStyle/>
+          <a:p>
+            <a:pPr marL="0" indent="0" algn="ctr">
+              <a:buNone/>
+            </a:pPr>
+            <a:r>
+              <a:rPr lang="en-US" sz="1000" b="1" dirty="0">
+                <a:solidFill>
+                  <a:srgbClr val="FFFFFF"/>
+                </a:solidFill>
+                <a:latin typeface="Calibri" pitchFamily="34" charset="0"/>
+                <a:ea typeface="Calibri" pitchFamily="34" charset="-122"/>
+                <a:cs typeface="Calibri" pitchFamily="34" charset="-120"/>
+              </a:rPr>
+              <a:t>NON-COMPLIANT — mask missing (0.87)</a:t>
+            </a:r>
+            <a:endParaRPr lang="en-US" sz="1000" dirty="0"/>
+          </a:p>
+        </p:txBody>
+      </p:sp>
+      <p:sp>
+        <p:nvSpPr>
+          <p:cNvPr id="8" name="Shape 5"/>
+          <p:cNvSpPr/>
+          <p:nvPr/>
+        </p:nvSpPr>
+        <p:spPr>
+          <a:xfrm>
+            <a:off x="4297680" y="1463040"/>
+            <a:ext cx="3520440" cy="4114800"/>
+          </a:xfrm>
+          <a:prstGeom prst="roundRect">
+            <a:avLst>
+              <a:gd name="adj" fmla="val 1558"/>
+            </a:avLst>
+          </a:prstGeom>
+          <a:solidFill>
+            <a:srgbClr val="FFFFFF"/>
+          </a:solidFill>
+          <a:ln/>
+          <a:effectLst>
+            <a:outerShdw blurRad="63500" dist="25400" dir="5400000" algn="bl" rotWithShape="0">
+              <a:srgbClr val="1A2B33">
+                <a:alpha val="18000"/>
+              </a:srgbClr>
+            </a:outerShdw>
+          </a:effectLst>
+        </p:spPr>
+      </p:sp>
+      <p:pic>
+        <p:nvPicPr>
+          <p:cNvPr id="9" name="Image 1" descr="/home/claude/pptx_build/demo2.png"/>
+          <p:cNvPicPr>
+            <a:picLocks noChangeAspect="1"/>
+          </p:cNvPicPr>
+          <p:nvPr/>
+        </p:nvPicPr>
+        <p:blipFill>
+          <a:blip r:embed="rId4"/>
+          <a:stretch>
+            <a:fillRect/>
+          </a:stretch>
+        </p:blipFill>
+        <p:spPr>
+          <a:xfrm>
+            <a:off x="4389120" y="1554480"/>
+            <a:ext cx="3337560" cy="3566160"/>
+          </a:xfrm>
+          <a:prstGeom prst="rect">
+            <a:avLst/>
+          </a:prstGeom>
+        </p:spPr>
+      </p:pic>
+      <p:sp>
+        <p:nvSpPr>
+          <p:cNvPr id="10" name="Shape 6"/>
+          <p:cNvSpPr/>
+          <p:nvPr/>
+        </p:nvSpPr>
+        <p:spPr>
+          <a:xfrm>
+            <a:off x="4434840" y="5193792"/>
+            <a:ext cx="3246120" cy="320040"/>
+          </a:xfrm>
+          <a:prstGeom prst="roundRect">
+            <a:avLst>
+              <a:gd name="adj" fmla="val 48571"/>
+            </a:avLst>
+          </a:prstGeom>
+          <a:solidFill>
+            <a:srgbClr val="C0392B"/>
+          </a:solidFill>
+          <a:ln/>
+        </p:spPr>
+      </p:sp>
+      <p:sp>
+        <p:nvSpPr>
+          <p:cNvPr id="11" name="Text 7"/>
+          <p:cNvSpPr/>
+          <p:nvPr/>
+        </p:nvSpPr>
+        <p:spPr>
+          <a:xfrm>
+            <a:off x="4434840" y="5193792"/>
+            <a:ext cx="3246120" cy="320040"/>
+          </a:xfrm>
+          <a:prstGeom prst="rect">
+            <a:avLst/>
+          </a:prstGeom>
+          <a:noFill/>
+          <a:ln/>
+        </p:spPr>
+        <p:txBody>
+          <a:bodyPr wrap="square" rtlCol="0" anchor="ctr"/>
+          <a:lstStyle/>
+          <a:p>
+            <a:pPr marL="0" indent="0" algn="ctr">
+              <a:buNone/>
+            </a:pPr>
+            <a:r>
+              <a:rPr lang="en-US" sz="1000" b="1" dirty="0">
+                <a:solidFill>
+                  <a:srgbClr val="FFFFFF"/>
+                </a:solidFill>
+                <a:latin typeface="Calibri" pitchFamily="34" charset="0"/>
+                <a:ea typeface="Calibri" pitchFamily="34" charset="-122"/>
+                <a:cs typeface="Calibri" pitchFamily="34" charset="-120"/>
+              </a:rPr>
+              <a:t>NON-COMPLIANT — mask missing (0.90)</a:t>
+            </a:r>
+            <a:endParaRPr lang="en-US" sz="1000" dirty="0"/>
+          </a:p>
+        </p:txBody>
+      </p:sp>
+      <p:sp>
+        <p:nvSpPr>
+          <p:cNvPr id="12" name="Shape 8"/>
+          <p:cNvSpPr/>
+          <p:nvPr/>
+        </p:nvSpPr>
+        <p:spPr>
+          <a:xfrm>
+            <a:off x="8046720" y="1463040"/>
+            <a:ext cx="3520440" cy="4114800"/>
+          </a:xfrm>
+          <a:prstGeom prst="roundRect">
+            <a:avLst>
+              <a:gd name="adj" fmla="val 1558"/>
+            </a:avLst>
+          </a:prstGeom>
+          <a:solidFill>
+            <a:srgbClr val="FFFFFF"/>
+          </a:solidFill>
+          <a:ln/>
+          <a:effectLst>
+            <a:outerShdw blurRad="63500" dist="25400" dir="5400000" algn="bl" rotWithShape="0">
+              <a:srgbClr val="1A2B33">
+                <a:alpha val="18000"/>
+              </a:srgbClr>
+            </a:outerShdw>
+          </a:effectLst>
+        </p:spPr>
+      </p:sp>
+      <p:pic>
+        <p:nvPicPr>
+          <p:cNvPr id="13" name="Image 2" descr="/home/claude/pptx_build/demo3.png"/>
+          <p:cNvPicPr>
+            <a:picLocks noChangeAspect="1"/>
+          </p:cNvPicPr>
+          <p:nvPr/>
+        </p:nvPicPr>
+        <p:blipFill>
+          <a:blip r:embed="rId5"/>
+          <a:stretch>
+            <a:fillRect/>
+          </a:stretch>
+        </p:blipFill>
+        <p:spPr>
+          <a:xfrm>
+            <a:off x="8138160" y="1554480"/>
+            <a:ext cx="3337560" cy="3566160"/>
+          </a:xfrm>
+          <a:prstGeom prst="rect">
+            <a:avLst/>
+          </a:prstGeom>
+        </p:spPr>
+      </p:pic>
+      <p:sp>
+        <p:nvSpPr>
+          <p:cNvPr id="14" name="Shape 9"/>
+          <p:cNvSpPr/>
+          <p:nvPr/>
+        </p:nvSpPr>
+        <p:spPr>
+          <a:xfrm>
+            <a:off x="8183880" y="5193792"/>
+            <a:ext cx="3246120" cy="320040"/>
+          </a:xfrm>
+          <a:prstGeom prst="roundRect">
+            <a:avLst>
+              <a:gd name="adj" fmla="val 48571"/>
+            </a:avLst>
+          </a:prstGeom>
+          <a:solidFill>
             <a:srgbClr val="2E8B57"/>
           </a:solidFill>
           <a:ln/>
@@ -9984,7 +9752,7 @@
           <a:bodyPr wrap="square" rtlCol="0" anchor="ctr"/>
           <a:lstStyle/>
           <a:p>
-            <a:pPr algn="ctr" indent="0" marL="0">
+            <a:pPr marL="0" indent="0" algn="ctr">
               <a:buNone/>
             </a:pPr>
             <a:r>
@@ -10023,7 +9791,7 @@
           <a:bodyPr wrap="square" rtlCol="0" anchor="ctr"/>
           <a:lstStyle/>
           <a:p>
-            <a:pPr indent="0" marL="0">
+            <a:pPr marL="0" indent="0">
               <a:buNone/>
             </a:pPr>
             <a:r>
@@ -10062,7 +9830,7 @@
           <a:bodyPr wrap="square" rtlCol="0" anchor="ctr"/>
           <a:lstStyle/>
           <a:p>
-            <a:pPr algn="r" indent="0" marL="0">
+            <a:pPr marL="0" indent="0" algn="r">
               <a:buNone/>
             </a:pPr>
             <a:r>
@@ -10096,6 +9864,7 @@
         <a:solidFill>
           <a:srgbClr val="F4F7F6"/>
         </a:solidFill>
+        <a:effectLst/>
       </p:bgPr>
     </p:bg>
     <p:spTree>
@@ -10133,7 +9902,7 @@
           <a:bodyPr wrap="square" rtlCol="0" anchor="ctr"/>
           <a:lstStyle/>
           <a:p>
-            <a:pPr indent="0" marL="0">
+            <a:pPr marL="0" indent="0">
               <a:buNone/>
             </a:pPr>
             <a:r>
@@ -10172,7 +9941,7 @@
           </a:solidFill>
           <a:ln/>
           <a:effectLst>
-            <a:outerShdw sx="100000" sy="100000" kx="0" ky="0" algn="bl" rotWithShape="0" blurRad="76200" dist="25400" dir="5400000">
+            <a:outerShdw blurRad="76200" dist="25400" dir="5400000" algn="bl" rotWithShape="0">
               <a:srgbClr val="1A2B33">
                 <a:alpha val="20000"/>
               </a:srgbClr>
@@ -10221,11 +9990,11 @@
           <a:bodyPr wrap="square" rtlCol="0" anchor="ctr"/>
           <a:lstStyle/>
           <a:p>
-            <a:pPr algn="ctr" indent="0" marL="0">
-              <a:buNone/>
-            </a:pPr>
-            <a:r>
-              <a:rPr lang="en-US" sz="1200" b="1" spc="100" kern="0" dirty="0">
+            <a:pPr marL="0" indent="0" algn="ctr">
+              <a:buNone/>
+            </a:pPr>
+            <a:r>
+              <a:rPr lang="en-US" sz="1200" b="1" kern="0" spc="100" dirty="0">
                 <a:solidFill>
                   <a:srgbClr val="CADCE0"/>
                 </a:solidFill>
@@ -10260,7 +10029,7 @@
           <a:bodyPr wrap="square" rtlCol="0" anchor="ctr"/>
           <a:lstStyle/>
           <a:p>
-            <a:pPr algn="ctr" indent="0" marL="0">
+            <a:pPr marL="0" indent="0" algn="ctr">
               <a:buNone/>
             </a:pPr>
             <a:r>
@@ -10299,7 +10068,7 @@
           <a:bodyPr wrap="square" rtlCol="0" anchor="ctr"/>
           <a:lstStyle/>
           <a:p>
-            <a:pPr algn="ctr" indent="0" marL="0">
+            <a:pPr marL="0" indent="0" algn="ctr">
               <a:buNone/>
             </a:pPr>
             <a:r>
@@ -10360,7 +10129,7 @@
           <a:bodyPr wrap="square" rtlCol="0" anchor="ctr"/>
           <a:lstStyle/>
           <a:p>
-            <a:pPr algn="ctr" indent="0" marL="0">
+            <a:pPr marL="0" indent="0" algn="ctr">
               <a:buNone/>
             </a:pPr>
             <a:r>
@@ -10399,7 +10168,7 @@
           <a:bodyPr wrap="square" rtlCol="0" anchor="t"/>
           <a:lstStyle/>
           <a:p>
-            <a:pPr algn="ctr" indent="0" marL="0">
+            <a:pPr marL="0" indent="0" algn="ctr">
               <a:buNone/>
             </a:pPr>
             <a:r>
@@ -10438,7 +10207,7 @@
           </a:solidFill>
           <a:ln/>
           <a:effectLst>
-            <a:outerShdw sx="100000" sy="100000" kx="0" ky="0" algn="bl" rotWithShape="0" blurRad="76200" dist="25400" dir="5400000">
+            <a:outerShdw blurRad="76200" dist="25400" dir="5400000" algn="bl" rotWithShape="0">
               <a:srgbClr val="1A2B33">
                 <a:alpha val="20000"/>
               </a:srgbClr>
@@ -10487,11 +10256,11 @@
           <a:bodyPr wrap="square" rtlCol="0" anchor="ctr"/>
           <a:lstStyle/>
           <a:p>
-            <a:pPr algn="ctr" indent="0" marL="0">
-              <a:buNone/>
-            </a:pPr>
-            <a:r>
-              <a:rPr lang="en-US" sz="1200" b="1" spc="100" kern="0" dirty="0">
+            <a:pPr marL="0" indent="0" algn="ctr">
+              <a:buNone/>
+            </a:pPr>
+            <a:r>
+              <a:rPr lang="en-US" sz="1200" b="1" kern="0" spc="100" dirty="0">
                 <a:solidFill>
                   <a:srgbClr val="CADCE0"/>
                 </a:solidFill>
@@ -10526,7 +10295,7 @@
           <a:bodyPr wrap="square" rtlCol="0" anchor="ctr"/>
           <a:lstStyle/>
           <a:p>
-            <a:pPr algn="ctr" indent="0" marL="0">
+            <a:pPr marL="0" indent="0" algn="ctr">
               <a:buNone/>
             </a:pPr>
             <a:r>
@@ -10565,7 +10334,7 @@
           <a:bodyPr wrap="square" rtlCol="0" anchor="ctr"/>
           <a:lstStyle/>
           <a:p>
-            <a:pPr algn="ctr" indent="0" marL="0">
+            <a:pPr marL="0" indent="0" algn="ctr">
               <a:buNone/>
             </a:pPr>
             <a:r>
@@ -10604,7 +10373,7 @@
           <a:bodyPr wrap="square" rtlCol="0" anchor="ctr"/>
           <a:lstStyle/>
           <a:p>
-            <a:pPr algn="ctr" indent="0" marL="0">
+            <a:pPr marL="0" indent="0" algn="ctr">
               <a:buNone/>
             </a:pPr>
             <a:r>
@@ -10643,7 +10412,7 @@
           <a:bodyPr wrap="square" rtlCol="0" anchor="t"/>
           <a:lstStyle/>
           <a:p>
-            <a:pPr algn="ctr" indent="0" marL="0">
+            <a:pPr marL="0" indent="0" algn="ctr">
               <a:buNone/>
             </a:pPr>
             <a:r>
@@ -10682,7 +10451,7 @@
           <a:bodyPr wrap="square" rtlCol="0" anchor="ctr"/>
           <a:lstStyle/>
           <a:p>
-            <a:pPr indent="0" marL="0">
+            <a:pPr marL="0" indent="0">
               <a:buNone/>
             </a:pPr>
             <a:r>
@@ -10721,7 +10490,7 @@
           <a:bodyPr wrap="square" rtlCol="0" anchor="ctr"/>
           <a:lstStyle/>
           <a:p>
-            <a:pPr algn="r" indent="0" marL="0">
+            <a:pPr marL="0" indent="0" algn="r">
               <a:buNone/>
             </a:pPr>
             <a:r>
@@ -11040,4 +10809,319 @@
     </a:ext>
   </a:extLst>
 </a:theme>
+</file>
+
+<file path=ppt/theme/theme2.xml><?xml version="1.0" encoding="utf-8"?>
+<a:theme xmlns:a="http://schemas.openxmlformats.org/drawingml/2006/main" name="Office Theme">
+  <a:themeElements>
+    <a:clrScheme name="Office">
+      <a:dk1>
+        <a:sysClr val="windowText" lastClr="000000"/>
+      </a:dk1>
+      <a:lt1>
+        <a:sysClr val="window" lastClr="FFFFFF"/>
+      </a:lt1>
+      <a:dk2>
+        <a:srgbClr val="0E2841"/>
+      </a:dk2>
+      <a:lt2>
+        <a:srgbClr val="E8E8E8"/>
+      </a:lt2>
+      <a:accent1>
+        <a:srgbClr val="156082"/>
+      </a:accent1>
+      <a:accent2>
+        <a:srgbClr val="E97132"/>
+      </a:accent2>
+      <a:accent3>
+        <a:srgbClr val="196B24"/>
+      </a:accent3>
+      <a:accent4>
+        <a:srgbClr val="0F9ED5"/>
+      </a:accent4>
+      <a:accent5>
+        <a:srgbClr val="A02B93"/>
+      </a:accent5>
+      <a:accent6>
+        <a:srgbClr val="4EA72E"/>
+      </a:accent6>
+      <a:hlink>
+        <a:srgbClr val="467886"/>
+      </a:hlink>
+      <a:folHlink>
+        <a:srgbClr val="96607D"/>
+      </a:folHlink>
+    </a:clrScheme>
+    <a:fontScheme name="Office">
+      <a:majorFont>
+        <a:latin typeface="Aptos Display" panose="02110004020202020204"/>
+        <a:ea typeface=""/>
+        <a:cs typeface=""/>
+        <a:font script="Jpan" typeface="游ゴシック Light"/>
+        <a:font script="Hang" typeface="맑은 고딕"/>
+        <a:font script="Hans" typeface="等线 Light"/>
+        <a:font script="Hant" typeface="新細明體"/>
+        <a:font script="Arab" typeface="Times New Roman"/>
+        <a:font script="Hebr" typeface="Times New Roman"/>
+        <a:font script="Thai" typeface="Angsana New"/>
+        <a:font script="Ethi" typeface="Nyala"/>
+        <a:font script="Beng" typeface="Vrinda"/>
+        <a:font script="Gujr" typeface="Shruti"/>
+        <a:font script="Khmr" typeface="MoolBoran"/>
+        <a:font script="Knda" typeface="Tunga"/>
+        <a:font script="Guru" typeface="Raavi"/>
+        <a:font script="Cans" typeface="Euphemia"/>
+        <a:font script="Cher" typeface="Plantagenet Cherokee"/>
+        <a:font script="Yiii" typeface="Microsoft Yi Baiti"/>
+        <a:font script="Tibt" typeface="Microsoft Himalaya"/>
+        <a:font script="Thaa" typeface="MV Boli"/>
+        <a:font script="Deva" typeface="Mangal"/>
+        <a:font script="Telu" typeface="Gautami"/>
+        <a:font script="Taml" typeface="Latha"/>
+        <a:font script="Syrc" typeface="Estrangelo Edessa"/>
+        <a:font script="Orya" typeface="Kalinga"/>
+        <a:font script="Mlym" typeface="Kartika"/>
+        <a:font script="Laoo" typeface="DokChampa"/>
+        <a:font script="Sinh" typeface="Iskoola Pota"/>
+        <a:font script="Mong" typeface="Mongolian Baiti"/>
+        <a:font script="Viet" typeface="Times New Roman"/>
+        <a:font script="Uigh" typeface="Microsoft Uighur"/>
+        <a:font script="Geor" typeface="Sylfaen"/>
+        <a:font script="Armn" typeface="Arial"/>
+        <a:font script="Bugi" typeface="Leelawadee UI"/>
+        <a:font script="Bopo" typeface="Microsoft JhengHei"/>
+        <a:font script="Java" typeface="Javanese Text"/>
+        <a:font script="Lisu" typeface="Segoe UI"/>
+        <a:font script="Mymr" typeface="Myanmar Text"/>
+        <a:font script="Nkoo" typeface="Ebrima"/>
+        <a:font script="Olck" typeface="Nirmala UI"/>
+        <a:font script="Osma" typeface="Ebrima"/>
+        <a:font script="Phag" typeface="Phagspa"/>
+        <a:font script="Syrn" typeface="Estrangelo Edessa"/>
+        <a:font script="Syrj" typeface="Estrangelo Edessa"/>
+        <a:font script="Syre" typeface="Estrangelo Edessa"/>
+        <a:font script="Sora" typeface="Nirmala UI"/>
+        <a:font script="Tale" typeface="Microsoft Tai Le"/>
+        <a:font script="Talu" typeface="Microsoft New Tai Lue"/>
+        <a:font script="Tfng" typeface="Ebrima"/>
+      </a:majorFont>
+      <a:minorFont>
+        <a:latin typeface="Aptos" panose="02110004020202020204"/>
+        <a:ea typeface=""/>
+        <a:cs typeface=""/>
+        <a:font script="Jpan" typeface="游ゴシック"/>
+        <a:font script="Hang" typeface="맑은 고딕"/>
+        <a:font script="Hans" typeface="等线"/>
+        <a:font script="Hant" typeface="新細明體"/>
+        <a:font script="Arab" typeface="Arial"/>
+        <a:font script="Hebr" typeface="Arial"/>
+        <a:font script="Thai" typeface="Cordia New"/>
+        <a:font script="Ethi" typeface="Nyala"/>
+        <a:font script="Beng" typeface="Vrinda"/>
+        <a:font script="Gujr" typeface="Shruti"/>
+        <a:font script="Khmr" typeface="DaunPenh"/>
+        <a:font script="Knda" typeface="Tunga"/>
+        <a:font script="Guru" typeface="Raavi"/>
+        <a:font script="Cans" typeface="Euphemia"/>
+        <a:font script="Cher" typeface="Plantagenet Cherokee"/>
+        <a:font script="Yiii" typeface="Microsoft Yi Baiti"/>
+        <a:font script="Tibt" typeface="Microsoft Himalaya"/>
+        <a:font script="Thaa" typeface="MV Boli"/>
+        <a:font script="Deva" typeface="Mangal"/>
+        <a:font script="Telu" typeface="Gautami"/>
+        <a:font script="Taml" typeface="Latha"/>
+        <a:font script="Syrc" typeface="Estrangelo Edessa"/>
+        <a:font script="Orya" typeface="Kalinga"/>
+        <a:font script="Mlym" typeface="Kartika"/>
+        <a:font script="Laoo" typeface="DokChampa"/>
+        <a:font script="Sinh" typeface="Iskoola Pota"/>
+        <a:font script="Mong" typeface="Mongolian Baiti"/>
+        <a:font script="Viet" typeface="Arial"/>
+        <a:font script="Uigh" typeface="Microsoft Uighur"/>
+        <a:font script="Geor" typeface="Sylfaen"/>
+        <a:font script="Armn" typeface="Arial"/>
+        <a:font script="Bugi" typeface="Leelawadee UI"/>
+        <a:font script="Bopo" typeface="Microsoft JhengHei"/>
+        <a:font script="Java" typeface="Javanese Text"/>
+        <a:font script="Lisu" typeface="Segoe UI"/>
+        <a:font script="Mymr" typeface="Myanmar Text"/>
+        <a:font script="Nkoo" typeface="Ebrima"/>
+        <a:font script="Olck" typeface="Nirmala UI"/>
+        <a:font script="Osma" typeface="Ebrima"/>
+        <a:font script="Phag" typeface="Phagspa"/>
+        <a:font script="Syrn" typeface="Estrangelo Edessa"/>
+        <a:font script="Syrj" typeface="Estrangelo Edessa"/>
+        <a:font script="Syre" typeface="Estrangelo Edessa"/>
+        <a:font script="Sora" typeface="Nirmala UI"/>
+        <a:font script="Tale" typeface="Microsoft Tai Le"/>
+        <a:font script="Talu" typeface="Microsoft New Tai Lue"/>
+        <a:font script="Tfng" typeface="Ebrima"/>
+      </a:minorFont>
+    </a:fontScheme>
+    <a:fmtScheme name="Office">
+      <a:fillStyleLst>
+        <a:solidFill>
+          <a:schemeClr val="phClr"/>
+        </a:solidFill>
+        <a:gradFill rotWithShape="1">
+          <a:gsLst>
+            <a:gs pos="0">
+              <a:schemeClr val="phClr">
+                <a:lumMod val="110000"/>
+                <a:satMod val="105000"/>
+                <a:tint val="67000"/>
+              </a:schemeClr>
+            </a:gs>
+            <a:gs pos="50000">
+              <a:schemeClr val="phClr">
+                <a:lumMod val="105000"/>
+                <a:satMod val="103000"/>
+                <a:tint val="73000"/>
+              </a:schemeClr>
+            </a:gs>
+            <a:gs pos="100000">
+              <a:schemeClr val="phClr">
+                <a:lumMod val="105000"/>
+                <a:satMod val="109000"/>
+                <a:tint val="81000"/>
+              </a:schemeClr>
+            </a:gs>
+          </a:gsLst>
+          <a:lin ang="5400000" scaled="0"/>
+        </a:gradFill>
+        <a:gradFill rotWithShape="1">
+          <a:gsLst>
+            <a:gs pos="0">
+              <a:schemeClr val="phClr">
+                <a:satMod val="103000"/>
+                <a:lumMod val="102000"/>
+                <a:tint val="94000"/>
+              </a:schemeClr>
+            </a:gs>
+            <a:gs pos="50000">
+              <a:schemeClr val="phClr">
+                <a:satMod val="110000"/>
+                <a:lumMod val="100000"/>
+                <a:shade val="100000"/>
+              </a:schemeClr>
+            </a:gs>
+            <a:gs pos="100000">
+              <a:schemeClr val="phClr">
+                <a:lumMod val="99000"/>
+                <a:satMod val="120000"/>
+                <a:shade val="78000"/>
+              </a:schemeClr>
+            </a:gs>
+          </a:gsLst>
+          <a:lin ang="5400000" scaled="0"/>
+        </a:gradFill>
+      </a:fillStyleLst>
+      <a:lnStyleLst>
+        <a:ln w="12700" cap="flat" cmpd="sng" algn="ctr">
+          <a:solidFill>
+            <a:schemeClr val="phClr"/>
+          </a:solidFill>
+          <a:prstDash val="solid"/>
+          <a:miter lim="800000"/>
+        </a:ln>
+        <a:ln w="19050" cap="flat" cmpd="sng" algn="ctr">
+          <a:solidFill>
+            <a:schemeClr val="phClr"/>
+          </a:solidFill>
+          <a:prstDash val="solid"/>
+          <a:miter lim="800000"/>
+        </a:ln>
+        <a:ln w="25400" cap="flat" cmpd="sng" algn="ctr">
+          <a:solidFill>
+            <a:schemeClr val="phClr"/>
+          </a:solidFill>
+          <a:prstDash val="solid"/>
+          <a:miter lim="800000"/>
+        </a:ln>
+      </a:lnStyleLst>
+      <a:effectStyleLst>
+        <a:effectStyle>
+          <a:effectLst/>
+        </a:effectStyle>
+        <a:effectStyle>
+          <a:effectLst/>
+        </a:effectStyle>
+        <a:effectStyle>
+          <a:effectLst>
+            <a:outerShdw blurRad="57150" dist="19050" dir="5400000" algn="ctr" rotWithShape="0">
+              <a:srgbClr val="000000">
+                <a:alpha val="63000"/>
+              </a:srgbClr>
+            </a:outerShdw>
+          </a:effectLst>
+        </a:effectStyle>
+      </a:effectStyleLst>
+      <a:bgFillStyleLst>
+        <a:solidFill>
+          <a:schemeClr val="phClr"/>
+        </a:solidFill>
+        <a:solidFill>
+          <a:schemeClr val="phClr">
+            <a:tint val="95000"/>
+            <a:satMod val="170000"/>
+          </a:schemeClr>
+        </a:solidFill>
+        <a:gradFill rotWithShape="1">
+          <a:gsLst>
+            <a:gs pos="0">
+              <a:schemeClr val="phClr">
+                <a:tint val="93000"/>
+                <a:satMod val="150000"/>
+                <a:shade val="98000"/>
+                <a:lumMod val="102000"/>
+              </a:schemeClr>
+            </a:gs>
+            <a:gs pos="50000">
+              <a:schemeClr val="phClr">
+                <a:tint val="98000"/>
+                <a:satMod val="130000"/>
+                <a:shade val="90000"/>
+                <a:lumMod val="103000"/>
+              </a:schemeClr>
+            </a:gs>
+            <a:gs pos="100000">
+              <a:schemeClr val="phClr">
+                <a:shade val="63000"/>
+                <a:satMod val="120000"/>
+              </a:schemeClr>
+            </a:gs>
+          </a:gsLst>
+          <a:lin ang="5400000" scaled="0"/>
+        </a:gradFill>
+      </a:bgFillStyleLst>
+    </a:fmtScheme>
+  </a:themeElements>
+  <a:objectDefaults>
+    <a:lnDef>
+      <a:spPr/>
+      <a:bodyPr/>
+      <a:lstStyle/>
+      <a:style>
+        <a:lnRef idx="2">
+          <a:schemeClr val="accent1"/>
+        </a:lnRef>
+        <a:fillRef idx="0">
+          <a:schemeClr val="accent1"/>
+        </a:fillRef>
+        <a:effectRef idx="1">
+          <a:schemeClr val="accent1"/>
+        </a:effectRef>
+        <a:fontRef idx="minor">
+          <a:schemeClr val="tx1"/>
+        </a:fontRef>
+      </a:style>
+    </a:lnDef>
+  </a:objectDefaults>
+  <a:extraClrSchemeLst/>
+  <a:extLst>
+    <a:ext uri="{05A4C25C-085E-4340-85A3-A5531E510DB2}">
+      <thm15:themeFamily xmlns:thm15="http://schemas.microsoft.com/office/thememl/2012/main" name="Office Theme" id="{2E142A2C-CD16-42D6-873A-C26D2A0506FA}" vid="{1BDDFF52-6CD6-40A5-AB3C-68EB2F1E4D0A}"/>
+    </a:ext>
+  </a:extLst>
+</a:theme>
 </file>